--- a/week-02/day-1/Week2_Day1_Facilitator_Slides.pptx
+++ b/week-02/day-1/Week2_Day1_Facilitator_Slides.pptx
@@ -4,6 +4,9 @@
   <p:sldMasterIdLst>
     <p:sldMasterId id="2147483648" r:id="rId1"/>
   </p:sldMasterIdLst>
+  <p:notesMasterIdLst>
+    <p:notesMasterId r:id="rId17"/>
+  </p:notesMasterIdLst>
   <p:sldIdLst>
     <p:sldId id="256" r:id="rId2"/>
     <p:sldId id="257" r:id="rId3"/>
@@ -21,9 +24,6 @@
     <p:sldId id="269" r:id="rId15"/>
     <p:sldId id="270" r:id="rId16"/>
   </p:sldIdLst>
-  <p:notesMasterIdLst>
-    <p:notesMasterId r:id="rId17"/>
-  </p:notesMasterIdLst>
   <p:sldSz cx="12192000" cy="6858000"/>
   <p:notesSz cx="6858000" cy="12192000"/>
   <p:defaultTextStyle>
@@ -118,6 +118,11 @@
       </a:defRPr>
     </a:lvl9pPr>
   </p:defaultTextStyle>
+  <p:extLst>
+    <p:ext uri="{EFAFB233-063F-42B5-8137-9DF3F51BA10A}">
+      <p15:sldGuideLst xmlns:p15="http://schemas.microsoft.com/office/powerpoint/2012/main"/>
+    </p:ext>
+  </p:extLst>
 </p:presentation>
 </file>
 
@@ -143,234 +148,10 @@
           <a:chExt cx="0" cy="0"/>
         </a:xfrm>
       </p:grpSpPr>
-      <p:sp>
-        <p:nvSpPr>
-          <p:cNvPr id="2" name="Header Placeholder 1"/>
-          <p:cNvSpPr>
-            <a:spLocks noGrp="1"/>
-          </p:cNvSpPr>
-          <p:nvPr>
-            <p:ph type="hdr" sz="quarter"/>
-          </p:nvPr>
-        </p:nvSpPr>
-        <p:spPr>
-          <a:xfrm>
-            <a:off x="0" y="0"/>
-            <a:ext cx="2971800" cy="458788"/>
-          </a:xfrm>
-          <a:prstGeom prst="rect">
-            <a:avLst/>
-          </a:prstGeom>
-        </p:spPr>
-        <p:txBody>
-          <a:bodyPr vert="horz" lIns="91440" tIns="45720" rIns="91440" bIns="45720" rtlCol="0"/>
-          <a:lstStyle>
-            <a:lvl1pPr algn="l">
-              <a:defRPr sz="1200"/>
-            </a:lvl1pPr>
-          </a:lstStyle>
-          <a:p>
-            <a:endParaRPr lang="en-US"/>
-          </a:p>
-        </p:txBody>
-      </p:sp>
-      <p:sp>
-        <p:nvSpPr>
-          <p:cNvPr id="3" name="Date Placeholder 2"/>
-          <p:cNvSpPr>
-            <a:spLocks noGrp="1"/>
-          </p:cNvSpPr>
-          <p:nvPr>
-            <p:ph type="dt" idx="1"/>
-          </p:nvPr>
-        </p:nvSpPr>
-        <p:spPr>
-          <a:xfrm>
-            <a:off x="3884613" y="0"/>
-            <a:ext cx="2971800" cy="458788"/>
-          </a:xfrm>
-          <a:prstGeom prst="rect">
-            <a:avLst/>
-          </a:prstGeom>
-        </p:spPr>
-        <p:txBody>
-          <a:bodyPr vert="horz" lIns="91440" tIns="45720" rIns="91440" bIns="45720" rtlCol="0"/>
-          <a:lstStyle>
-            <a:lvl1pPr algn="r">
-              <a:defRPr sz="1200"/>
-            </a:lvl1pPr>
-          </a:lstStyle>
-          <a:p>
-            <a:fld id="{5282F153-3F37-0F45-9E97-73ACFA13230C}" type="datetimeFigureOut">
-              <a:rPr lang="en-US"/>
-              <a:t>7/23/19</a:t>
-            </a:fld>
-            <a:endParaRPr lang="en-US"/>
-          </a:p>
-        </p:txBody>
-      </p:sp>
-      <p:sp>
-        <p:nvSpPr>
-          <p:cNvPr id="4" name="Slide Image Placeholder 3"/>
-          <p:cNvSpPr>
-            <a:spLocks noGrp="1" noRot="1" noChangeAspect="1"/>
-          </p:cNvSpPr>
-          <p:nvPr>
-            <p:ph type="sldImg" idx="2"/>
-          </p:nvPr>
-        </p:nvSpPr>
-        <p:spPr>
-          <a:xfrm>
-            <a:off x="685800" y="1143000"/>
-            <a:ext cx="5486400" cy="3086100"/>
-          </a:xfrm>
-          <a:prstGeom prst="rect">
-            <a:avLst/>
-          </a:prstGeom>
-          <a:noFill/>
-          <a:ln w="12700">
-            <a:solidFill>
-              <a:prstClr val="black"/>
-            </a:solidFill>
-          </a:ln>
-        </p:spPr>
-        <p:txBody>
-          <a:bodyPr vert="horz" lIns="91440" tIns="45720" rIns="91440" bIns="45720" rtlCol="0" anchor="ctr"/>
-          <a:lstStyle/>
-          <a:p>
-            <a:endParaRPr lang="en-US"/>
-          </a:p>
-        </p:txBody>
-      </p:sp>
-      <p:sp>
-        <p:nvSpPr>
-          <p:cNvPr id="5" name="Notes Placeholder 4"/>
-          <p:cNvSpPr>
-            <a:spLocks noGrp="1"/>
-          </p:cNvSpPr>
-          <p:nvPr>
-            <p:ph type="body" sz="quarter" idx="3"/>
-          </p:nvPr>
-        </p:nvSpPr>
-        <p:spPr>
-          <a:xfrm>
-            <a:off x="685800" y="4400550"/>
-            <a:ext cx="5486400" cy="3600450"/>
-          </a:xfrm>
-          <a:prstGeom prst="rect">
-            <a:avLst/>
-          </a:prstGeom>
-        </p:spPr>
-        <p:txBody>
-          <a:bodyPr vert="horz" lIns="91440" tIns="45720" rIns="91440" bIns="45720" rtlCol="0"/>
-          <a:lstStyle/>
-          <a:p>
-            <a:pPr lvl="0"/>
-            <a:r>
-              <a:rPr lang="en-US"/>
-              <a:t>Click to edit Master text styles</a:t>
-            </a:r>
-          </a:p>
-          <a:p>
-            <a:pPr lvl="1"/>
-            <a:r>
-              <a:rPr lang="en-US"/>
-              <a:t>Second level</a:t>
-            </a:r>
-          </a:p>
-          <a:p>
-            <a:pPr lvl="2"/>
-            <a:r>
-              <a:rPr lang="en-US"/>
-              <a:t>Third level</a:t>
-            </a:r>
-          </a:p>
-          <a:p>
-            <a:pPr lvl="3"/>
-            <a:r>
-              <a:rPr lang="en-US"/>
-              <a:t>Fourth level</a:t>
-            </a:r>
-          </a:p>
-          <a:p>
-            <a:pPr lvl="4"/>
-            <a:r>
-              <a:rPr lang="en-US"/>
-              <a:t>Fifth level</a:t>
-            </a:r>
-          </a:p>
-        </p:txBody>
-      </p:sp>
-      <p:sp>
-        <p:nvSpPr>
-          <p:cNvPr id="6" name="Footer Placeholder 5"/>
-          <p:cNvSpPr>
-            <a:spLocks noGrp="1"/>
-          </p:cNvSpPr>
-          <p:nvPr>
-            <p:ph type="ftr" sz="quarter" idx="4"/>
-          </p:nvPr>
-        </p:nvSpPr>
-        <p:spPr>
-          <a:xfrm>
-            <a:off x="0" y="8685213"/>
-            <a:ext cx="2971800" cy="458787"/>
-          </a:xfrm>
-          <a:prstGeom prst="rect">
-            <a:avLst/>
-          </a:prstGeom>
-        </p:spPr>
-        <p:txBody>
-          <a:bodyPr vert="horz" lIns="91440" tIns="45720" rIns="91440" bIns="45720" rtlCol="0" anchor="b"/>
-          <a:lstStyle>
-            <a:lvl1pPr algn="l">
-              <a:defRPr sz="1200"/>
-            </a:lvl1pPr>
-          </a:lstStyle>
-          <a:p>
-            <a:endParaRPr lang="en-US"/>
-          </a:p>
-        </p:txBody>
-      </p:sp>
-      <p:sp>
-        <p:nvSpPr>
-          <p:cNvPr id="7" name="Slide Number Placeholder 6"/>
-          <p:cNvSpPr>
-            <a:spLocks noGrp="1"/>
-          </p:cNvSpPr>
-          <p:nvPr>
-            <p:ph type="sldNum" sz="quarter" idx="5"/>
-          </p:nvPr>
-        </p:nvSpPr>
-        <p:spPr>
-          <a:xfrm>
-            <a:off x="3884613" y="8685213"/>
-            <a:ext cx="2971800" cy="458787"/>
-          </a:xfrm>
-          <a:prstGeom prst="rect">
-            <a:avLst/>
-          </a:prstGeom>
-        </p:spPr>
-        <p:txBody>
-          <a:bodyPr vert="horz" lIns="91440" tIns="45720" rIns="91440" bIns="45720" rtlCol="0" anchor="b"/>
-          <a:lstStyle>
-            <a:lvl1pPr algn="r">
-              <a:defRPr sz="1200"/>
-            </a:lvl1pPr>
-          </a:lstStyle>
-          <a:p>
-            <a:fld id="{CE5E9CC1-C706-0F49-92D6-E571CC5EEA8F}" type="slidenum">
-              <a:rPr lang="en-US"/>
-              <a:t>‹#›</a:t>
-            </a:fld>
-            <a:endParaRPr lang="en-US"/>
-          </a:p>
-        </p:txBody>
-      </p:sp>
     </p:spTree>
     <p:extLst>
       <p:ext uri="{BB962C8B-B14F-4D97-AF65-F5344CB8AC3E}">
-        <p14:creationId xmlns:p14="http://schemas.microsoft.com/office/powerpoint/2010/main" val="1024086991"/>
+        <p14:creationId xmlns:p14="http://schemas.microsoft.com/office/powerpoint/2010/main" val="2941686656"/>
       </p:ext>
     </p:extLst>
   </p:cSld>
@@ -514,10 +295,6 @@
           <a:bodyPr/>
           <a:lstStyle/>
           <a:p>
-            <a:r>
-              <a:rPr lang="en-US" dirty="0"/>
-              <a:t/>
-            </a:r>
             <a:endParaRPr lang="en-US" dirty="0"/>
           </a:p>
         </p:txBody>
@@ -602,10 +379,6 @@
           <a:bodyPr/>
           <a:lstStyle/>
           <a:p>
-            <a:r>
-              <a:rPr lang="en-US" dirty="0"/>
-              <a:t/>
-            </a:r>
             <a:endParaRPr lang="en-US" dirty="0"/>
           </a:p>
         </p:txBody>
@@ -690,10 +463,6 @@
           <a:bodyPr/>
           <a:lstStyle/>
           <a:p>
-            <a:r>
-              <a:rPr lang="en-US" dirty="0"/>
-              <a:t/>
-            </a:r>
             <a:endParaRPr lang="en-US" dirty="0"/>
           </a:p>
         </p:txBody>
@@ -778,10 +547,6 @@
           <a:bodyPr/>
           <a:lstStyle/>
           <a:p>
-            <a:r>
-              <a:rPr lang="en-US" dirty="0"/>
-              <a:t/>
-            </a:r>
             <a:endParaRPr lang="en-US" dirty="0"/>
           </a:p>
         </p:txBody>
@@ -866,10 +631,6 @@
           <a:bodyPr/>
           <a:lstStyle/>
           <a:p>
-            <a:r>
-              <a:rPr lang="en-US" dirty="0"/>
-              <a:t/>
-            </a:r>
             <a:endParaRPr lang="en-US" dirty="0"/>
           </a:p>
         </p:txBody>
@@ -954,10 +715,6 @@
           <a:bodyPr/>
           <a:lstStyle/>
           <a:p>
-            <a:r>
-              <a:rPr lang="en-US" dirty="0"/>
-              <a:t/>
-            </a:r>
             <a:endParaRPr lang="en-US" dirty="0"/>
           </a:p>
         </p:txBody>
@@ -1042,10 +799,6 @@
           <a:bodyPr/>
           <a:lstStyle/>
           <a:p>
-            <a:r>
-              <a:rPr lang="en-US" dirty="0"/>
-              <a:t/>
-            </a:r>
             <a:endParaRPr lang="en-US" dirty="0"/>
           </a:p>
         </p:txBody>
@@ -1130,10 +883,6 @@
           <a:bodyPr/>
           <a:lstStyle/>
           <a:p>
-            <a:r>
-              <a:rPr lang="en-US" dirty="0"/>
-              <a:t/>
-            </a:r>
             <a:endParaRPr lang="en-US" dirty="0"/>
           </a:p>
         </p:txBody>
@@ -1218,10 +967,6 @@
           <a:bodyPr/>
           <a:lstStyle/>
           <a:p>
-            <a:r>
-              <a:rPr lang="en-US" dirty="0"/>
-              <a:t/>
-            </a:r>
             <a:endParaRPr lang="en-US" dirty="0"/>
           </a:p>
         </p:txBody>
@@ -1306,10 +1051,6 @@
           <a:bodyPr/>
           <a:lstStyle/>
           <a:p>
-            <a:r>
-              <a:rPr lang="en-US" dirty="0"/>
-              <a:t/>
-            </a:r>
             <a:endParaRPr lang="en-US" dirty="0"/>
           </a:p>
         </p:txBody>
@@ -1394,10 +1135,6 @@
           <a:bodyPr/>
           <a:lstStyle/>
           <a:p>
-            <a:r>
-              <a:rPr lang="en-US" dirty="0"/>
-              <a:t/>
-            </a:r>
             <a:endParaRPr lang="en-US" dirty="0"/>
           </a:p>
         </p:txBody>
@@ -1482,10 +1219,6 @@
           <a:bodyPr/>
           <a:lstStyle/>
           <a:p>
-            <a:r>
-              <a:rPr lang="en-US" dirty="0"/>
-              <a:t/>
-            </a:r>
             <a:endParaRPr lang="en-US" dirty="0"/>
           </a:p>
         </p:txBody>
@@ -1570,10 +1303,6 @@
           <a:bodyPr/>
           <a:lstStyle/>
           <a:p>
-            <a:r>
-              <a:rPr lang="en-US" dirty="0"/>
-              <a:t/>
-            </a:r>
             <a:endParaRPr lang="en-US" dirty="0"/>
           </a:p>
         </p:txBody>
@@ -1658,10 +1387,6 @@
           <a:bodyPr/>
           <a:lstStyle/>
           <a:p>
-            <a:r>
-              <a:rPr lang="en-US" dirty="0"/>
-              <a:t/>
-            </a:r>
             <a:endParaRPr lang="en-US" dirty="0"/>
           </a:p>
         </p:txBody>
@@ -1746,10 +1471,6 @@
           <a:bodyPr/>
           <a:lstStyle/>
           <a:p>
-            <a:r>
-              <a:rPr lang="en-US" dirty="0"/>
-              <a:t/>
-            </a:r>
             <a:endParaRPr lang="en-US" dirty="0"/>
           </a:p>
         </p:txBody>
@@ -1823,6 +1544,11 @@
 <file path=ppt/slideMasters/slideMaster1.xml><?xml version="1.0" encoding="utf-8"?>
 <p:sldMaster xmlns:a="http://schemas.openxmlformats.org/drawingml/2006/main" xmlns:r="http://schemas.openxmlformats.org/officeDocument/2006/relationships" xmlns:p="http://schemas.openxmlformats.org/presentationml/2006/main">
   <p:cSld>
+    <p:bg>
+      <p:bgRef idx="1001">
+        <a:schemeClr val="bg1"/>
+      </p:bgRef>
+    </p:bg>
     <p:spTree>
       <p:nvGrpSpPr>
         <p:cNvPr id="1" name=""/>
@@ -2105,6 +1831,7 @@
         <a:solidFill>
           <a:srgbClr val="013A40"/>
         </a:solidFill>
+        <a:effectLst/>
       </p:bgPr>
     </p:bg>
     <p:spTree>
@@ -2123,14 +1850,14 @@
       </p:grpSpPr>
       <p:pic>
         <p:nvPicPr>
-          <p:cNvPr id="2" name="Image 0" descr="preencoded.png">    </p:cNvPr>
+          <p:cNvPr id="2" name="Image 0" descr="preencoded.png"/>
           <p:cNvPicPr>
             <a:picLocks noChangeAspect="1"/>
           </p:cNvPicPr>
           <p:nvPr/>
         </p:nvPicPr>
         <p:blipFill>
-          <a:blip r:embed="rId1">
+          <a:blip r:embed="rId3">
             <a:alphaModFix amt="12000"/>
           </a:blip>
           <a:stretch>
@@ -2168,11 +1895,11 @@
           <a:bodyPr wrap="square" rtlCol="0" anchor="ctr"/>
           <a:lstStyle/>
           <a:p>
-            <a:pPr indent="0" marL="0">
-              <a:buNone/>
-            </a:pPr>
-            <a:r>
-              <a:rPr lang="en-US" sz="1400" b="1" spc="300" kern="0" dirty="0">
+            <a:pPr marL="0" indent="0">
+              <a:buNone/>
+            </a:pPr>
+            <a:r>
+              <a:rPr lang="en-US" sz="1400" b="1" kern="0" spc="300" dirty="0">
                 <a:solidFill>
                   <a:srgbClr val="00A896"/>
                 </a:solidFill>
@@ -2207,7 +1934,7 @@
           <a:bodyPr wrap="square" rtlCol="0" anchor="ctr"/>
           <a:lstStyle/>
           <a:p>
-            <a:pPr indent="0" marL="0">
+            <a:pPr marL="0" indent="0">
               <a:buNone/>
             </a:pPr>
             <a:r>
@@ -2246,7 +1973,7 @@
           <a:bodyPr wrap="square" rtlCol="0" anchor="ctr"/>
           <a:lstStyle/>
           <a:p>
-            <a:pPr indent="0" marL="0">
+            <a:pPr marL="0" indent="0">
               <a:buNone/>
             </a:pPr>
             <a:r>
@@ -2285,7 +2012,7 @@
           <a:bodyPr wrap="square" rtlCol="0" anchor="ctr"/>
           <a:lstStyle/>
           <a:p>
-            <a:pPr indent="0" marL="0">
+            <a:pPr marL="0" indent="0">
               <a:buNone/>
             </a:pPr>
             <a:r>
@@ -2319,6 +2046,7 @@
         <a:solidFill>
           <a:srgbClr val="FFFFFF"/>
         </a:solidFill>
+        <a:effectLst/>
       </p:bgPr>
     </p:bg>
     <p:spTree>
@@ -2356,11 +2084,11 @@
           <a:bodyPr wrap="square" rtlCol="0" anchor="ctr"/>
           <a:lstStyle/>
           <a:p>
-            <a:pPr indent="0" marL="0">
-              <a:buNone/>
-            </a:pPr>
-            <a:r>
-              <a:rPr lang="en-US" sz="1300" b="1" spc="200" kern="0" dirty="0">
+            <a:pPr marL="0" indent="0">
+              <a:buNone/>
+            </a:pPr>
+            <a:r>
+              <a:rPr lang="en-US" sz="1300" b="1" kern="0" spc="200" dirty="0">
                 <a:solidFill>
                   <a:srgbClr val="00A896"/>
                 </a:solidFill>
@@ -2395,7 +2123,7 @@
           <a:bodyPr wrap="square" rtlCol="0" anchor="ctr"/>
           <a:lstStyle/>
           <a:p>
-            <a:pPr indent="0" marL="0">
+            <a:pPr marL="0" indent="0">
               <a:buNone/>
             </a:pPr>
             <a:r>
@@ -2434,6 +2162,13 @@
           </a:solidFill>
           <a:ln/>
         </p:spPr>
+        <p:txBody>
+          <a:bodyPr/>
+          <a:lstStyle/>
+          <a:p>
+            <a:endParaRPr lang="en-US"/>
+          </a:p>
+        </p:txBody>
       </p:sp>
       <p:sp>
         <p:nvSpPr>
@@ -2456,7 +2191,7 @@
           <a:bodyPr wrap="square" rtlCol="0" anchor="ctr"/>
           <a:lstStyle/>
           <a:p>
-            <a:pPr indent="0" marL="0">
+            <a:pPr marL="0" indent="0">
               <a:buNone/>
             </a:pPr>
             <a:r>
@@ -2495,6 +2230,13 @@
           </a:solidFill>
           <a:ln/>
         </p:spPr>
+        <p:txBody>
+          <a:bodyPr/>
+          <a:lstStyle/>
+          <a:p>
+            <a:endParaRPr lang="en-US"/>
+          </a:p>
+        </p:txBody>
       </p:sp>
       <p:sp>
         <p:nvSpPr>
@@ -2517,7 +2259,7 @@
           <a:bodyPr wrap="square" rtlCol="0" anchor="ctr"/>
           <a:lstStyle/>
           <a:p>
-            <a:pPr indent="0" marL="0">
+            <a:pPr marL="0" indent="0">
               <a:buNone/>
             </a:pPr>
             <a:r>
@@ -2556,6 +2298,13 @@
           </a:solidFill>
           <a:ln/>
         </p:spPr>
+        <p:txBody>
+          <a:bodyPr/>
+          <a:lstStyle/>
+          <a:p>
+            <a:endParaRPr lang="en-US"/>
+          </a:p>
+        </p:txBody>
       </p:sp>
       <p:sp>
         <p:nvSpPr>
@@ -2578,7 +2327,7 @@
           <a:bodyPr wrap="square" rtlCol="0" anchor="ctr"/>
           <a:lstStyle/>
           <a:p>
-            <a:pPr indent="0" marL="0">
+            <a:pPr marL="0" indent="0">
               <a:buNone/>
             </a:pPr>
             <a:r>
@@ -2617,6 +2366,13 @@
           </a:solidFill>
           <a:ln/>
         </p:spPr>
+        <p:txBody>
+          <a:bodyPr/>
+          <a:lstStyle/>
+          <a:p>
+            <a:endParaRPr lang="en-US"/>
+          </a:p>
+        </p:txBody>
       </p:sp>
       <p:sp>
         <p:nvSpPr>
@@ -2639,7 +2395,7 @@
           <a:bodyPr wrap="square" rtlCol="0" anchor="ctr"/>
           <a:lstStyle/>
           <a:p>
-            <a:pPr indent="0" marL="0">
+            <a:pPr marL="0" indent="0">
               <a:buNone/>
             </a:pPr>
             <a:r>
@@ -2678,7 +2434,7 @@
           <a:bodyPr wrap="square" rtlCol="0" anchor="ctr"/>
           <a:lstStyle/>
           <a:p>
-            <a:pPr indent="0" marL="0">
+            <a:pPr marL="0" indent="0">
               <a:buNone/>
             </a:pPr>
             <a:r>
@@ -2717,7 +2473,7 @@
           <a:bodyPr wrap="square" rtlCol="0" anchor="ctr"/>
           <a:lstStyle/>
           <a:p>
-            <a:pPr algn="r" indent="0" marL="0">
+            <a:pPr marL="0" indent="0" algn="r">
               <a:buNone/>
             </a:pPr>
             <a:r>
@@ -2751,6 +2507,7 @@
         <a:solidFill>
           <a:srgbClr val="FFFFFF"/>
         </a:solidFill>
+        <a:effectLst/>
       </p:bgPr>
     </p:bg>
     <p:spTree>
@@ -2788,11 +2545,11 @@
           <a:bodyPr wrap="square" rtlCol="0" anchor="ctr"/>
           <a:lstStyle/>
           <a:p>
-            <a:pPr indent="0" marL="0">
-              <a:buNone/>
-            </a:pPr>
-            <a:r>
-              <a:rPr lang="en-US" sz="1300" b="1" spc="200" kern="0" dirty="0">
+            <a:pPr marL="0" indent="0">
+              <a:buNone/>
+            </a:pPr>
+            <a:r>
+              <a:rPr lang="en-US" sz="1300" b="1" kern="0" spc="200" dirty="0">
                 <a:solidFill>
                   <a:srgbClr val="00A896"/>
                 </a:solidFill>
@@ -2825,17 +2582,24 @@
           </a:solidFill>
           <a:ln/>
         </p:spPr>
+        <p:txBody>
+          <a:bodyPr/>
+          <a:lstStyle/>
+          <a:p>
+            <a:endParaRPr lang="en-US"/>
+          </a:p>
+        </p:txBody>
       </p:sp>
       <p:pic>
         <p:nvPicPr>
-          <p:cNvPr id="4" name="Image 0" descr="preencoded.png">    </p:cNvPr>
+          <p:cNvPr id="4" name="Image 0" descr="preencoded.png"/>
           <p:cNvPicPr>
             <a:picLocks noChangeAspect="1"/>
           </p:cNvPicPr>
           <p:nvPr/>
         </p:nvPicPr>
         <p:blipFill>
-          <a:blip r:embed="rId1"/>
+          <a:blip r:embed="rId3"/>
           <a:stretch>
             <a:fillRect/>
           </a:stretch>
@@ -2871,7 +2635,7 @@
           <a:bodyPr wrap="square" rtlCol="0" anchor="ctr"/>
           <a:lstStyle/>
           <a:p>
-            <a:pPr indent="0" marL="0">
+            <a:pPr marL="0" indent="0">
               <a:buNone/>
             </a:pPr>
             <a:r>
@@ -2910,6 +2674,13 @@
           </a:solidFill>
           <a:ln/>
         </p:spPr>
+        <p:txBody>
+          <a:bodyPr/>
+          <a:lstStyle/>
+          <a:p>
+            <a:endParaRPr lang="en-US"/>
+          </a:p>
+        </p:txBody>
       </p:sp>
       <p:sp>
         <p:nvSpPr>
@@ -2932,7 +2703,7 @@
           <a:bodyPr wrap="square" rtlCol="0" anchor="t"/>
           <a:lstStyle/>
           <a:p>
-            <a:pPr indent="0" marL="0">
+            <a:pPr marL="0" indent="0">
               <a:buNone/>
             </a:pPr>
             <a:r>
@@ -2950,7 +2721,7 @@
             <a:endParaRPr lang="en-US" sz="1800" dirty="0"/>
           </a:p>
           <a:p>
-            <a:pPr indent="0" marL="0">
+            <a:pPr marL="0" indent="0">
               <a:buNone/>
             </a:pPr>
             <a:r>
@@ -2968,7 +2739,7 @@
             <a:endParaRPr lang="en-US" sz="1800" dirty="0"/>
           </a:p>
           <a:p>
-            <a:pPr indent="0" marL="0">
+            <a:pPr marL="0" indent="0">
               <a:buNone/>
             </a:pPr>
             <a:r>
@@ -3007,7 +2778,7 @@
           <a:bodyPr wrap="square" rtlCol="0" anchor="ctr"/>
           <a:lstStyle/>
           <a:p>
-            <a:pPr algn="r" indent="0" marL="0">
+            <a:pPr marL="0" indent="0" algn="r">
               <a:buNone/>
             </a:pPr>
             <a:r>
@@ -3041,6 +2812,7 @@
         <a:solidFill>
           <a:srgbClr val="013A40"/>
         </a:solidFill>
+        <a:effectLst/>
       </p:bgPr>
     </p:bg>
     <p:spTree>
@@ -3078,11 +2850,11 @@
           <a:bodyPr wrap="square" rtlCol="0" anchor="ctr"/>
           <a:lstStyle/>
           <a:p>
-            <a:pPr indent="0" marL="0">
-              <a:buNone/>
-            </a:pPr>
-            <a:r>
-              <a:rPr lang="en-US" sz="1300" b="1" spc="200" kern="0" dirty="0">
+            <a:pPr marL="0" indent="0">
+              <a:buNone/>
+            </a:pPr>
+            <a:r>
+              <a:rPr lang="en-US" sz="1300" b="1" kern="0" spc="200" dirty="0">
                 <a:solidFill>
                   <a:srgbClr val="02C39A"/>
                 </a:solidFill>
@@ -3117,7 +2889,7 @@
           <a:bodyPr wrap="square" rtlCol="0" anchor="ctr"/>
           <a:lstStyle/>
           <a:p>
-            <a:pPr indent="0" marL="0">
+            <a:pPr marL="0" indent="0">
               <a:buNone/>
             </a:pPr>
             <a:r>
@@ -3154,176 +2926,17 @@
           </a:solidFill>
           <a:ln/>
         </p:spPr>
+        <p:txBody>
+          <a:bodyPr/>
+          <a:lstStyle/>
+          <a:p>
+            <a:endParaRPr lang="en-US"/>
+          </a:p>
+        </p:txBody>
       </p:sp>
       <p:pic>
         <p:nvPicPr>
-          <p:cNvPr id="5" name="Image 0" descr="preencoded.png">    </p:cNvPr>
-          <p:cNvPicPr>
-            <a:picLocks noChangeAspect="1"/>
-          </p:cNvPicPr>
-          <p:nvPr/>
-        </p:nvPicPr>
-        <p:blipFill>
-          <a:blip r:embed="rId1"/>
-          <a:stretch>
-            <a:fillRect/>
-          </a:stretch>
-        </p:blipFill>
-        <p:spPr>
-          <a:xfrm>
-            <a:off x="896112" y="1993392"/>
-            <a:ext cx="356616" cy="356616"/>
-          </a:xfrm>
-          <a:prstGeom prst="rect">
-            <a:avLst/>
-          </a:prstGeom>
-        </p:spPr>
-      </p:pic>
-      <p:sp>
-        <p:nvSpPr>
-          <p:cNvPr id="6" name="Text 3"/>
-          <p:cNvSpPr/>
-          <p:nvPr/>
-        </p:nvSpPr>
-        <p:spPr>
-          <a:xfrm>
-            <a:off x="1691640" y="1783080"/>
-            <a:ext cx="9326880" cy="822960"/>
-          </a:xfrm>
-          <a:prstGeom prst="rect">
-            <a:avLst/>
-          </a:prstGeom>
-          <a:noFill/>
-          <a:ln/>
-        </p:spPr>
-        <p:txBody>
-          <a:bodyPr wrap="square" rtlCol="0" anchor="ctr"/>
-          <a:lstStyle/>
-          <a:p>
-            <a:pPr indent="0" marL="0">
-              <a:buNone/>
-            </a:pPr>
-            <a:r>
-              <a:rPr lang="en-US" sz="1600" dirty="0">
-                <a:solidFill>
-                  <a:srgbClr val="E7F6F2"/>
-                </a:solidFill>
-                <a:latin typeface="Calibri" pitchFamily="34" charset="0"/>
-                <a:ea typeface="Calibri" pitchFamily="34" charset="-122"/>
-                <a:cs typeface="Calibri" pitchFamily="34" charset="-120"/>
-              </a:rPr>
-              <a:t>Functional testing checks if a feature works. Non-functional checks if it works well — speed, usability, security.</a:t>
-            </a:r>
-            <a:endParaRPr lang="en-US" sz="1600" dirty="0"/>
-          </a:p>
-        </p:txBody>
-      </p:sp>
-      <p:sp>
-        <p:nvSpPr>
-          <p:cNvPr id="7" name="Shape 4"/>
-          <p:cNvSpPr/>
-          <p:nvPr/>
-        </p:nvSpPr>
-        <p:spPr>
-          <a:xfrm>
-            <a:off x="731520" y="3154680"/>
-            <a:ext cx="685800" cy="685800"/>
-          </a:xfrm>
-          <a:prstGeom prst="ellipse">
-            <a:avLst/>
-          </a:prstGeom>
-          <a:solidFill>
-            <a:srgbClr val="00A896"/>
-          </a:solidFill>
-          <a:ln/>
-        </p:spPr>
-      </p:sp>
-      <p:pic>
-        <p:nvPicPr>
-          <p:cNvPr id="8" name="Image 1" descr="preencoded.png">    </p:cNvPr>
-          <p:cNvPicPr>
-            <a:picLocks noChangeAspect="1"/>
-          </p:cNvPicPr>
-          <p:nvPr/>
-        </p:nvPicPr>
-        <p:blipFill>
-          <a:blip r:embed="rId2"/>
-          <a:stretch>
-            <a:fillRect/>
-          </a:stretch>
-        </p:blipFill>
-        <p:spPr>
-          <a:xfrm>
-            <a:off x="896112" y="3319272"/>
-            <a:ext cx="356616" cy="356616"/>
-          </a:xfrm>
-          <a:prstGeom prst="rect">
-            <a:avLst/>
-          </a:prstGeom>
-        </p:spPr>
-      </p:pic>
-      <p:sp>
-        <p:nvSpPr>
-          <p:cNvPr id="9" name="Text 5"/>
-          <p:cNvSpPr/>
-          <p:nvPr/>
-        </p:nvSpPr>
-        <p:spPr>
-          <a:xfrm>
-            <a:off x="1691640" y="3108960"/>
-            <a:ext cx="9326880" cy="822960"/>
-          </a:xfrm>
-          <a:prstGeom prst="rect">
-            <a:avLst/>
-          </a:prstGeom>
-          <a:noFill/>
-          <a:ln/>
-        </p:spPr>
-        <p:txBody>
-          <a:bodyPr wrap="square" rtlCol="0" anchor="ctr"/>
-          <a:lstStyle/>
-          <a:p>
-            <a:pPr indent="0" marL="0">
-              <a:buNone/>
-            </a:pPr>
-            <a:r>
-              <a:rPr lang="en-US" sz="1600" dirty="0">
-                <a:solidFill>
-                  <a:srgbClr val="E7F6F2"/>
-                </a:solidFill>
-                <a:latin typeface="Calibri" pitchFamily="34" charset="0"/>
-                <a:ea typeface="Calibri" pitchFamily="34" charset="-122"/>
-                <a:cs typeface="Calibri" pitchFamily="34" charset="-120"/>
-              </a:rPr>
-              <a:t>Black box testing is from the outside, like a real user — that's most of what you'll do as a junior QA tester.</a:t>
-            </a:r>
-            <a:endParaRPr lang="en-US" sz="1600" dirty="0"/>
-          </a:p>
-        </p:txBody>
-      </p:sp>
-      <p:sp>
-        <p:nvSpPr>
-          <p:cNvPr id="10" name="Shape 6"/>
-          <p:cNvSpPr/>
-          <p:nvPr/>
-        </p:nvSpPr>
-        <p:spPr>
-          <a:xfrm>
-            <a:off x="731520" y="4480560"/>
-            <a:ext cx="685800" cy="685800"/>
-          </a:xfrm>
-          <a:prstGeom prst="ellipse">
-            <a:avLst/>
-          </a:prstGeom>
-          <a:solidFill>
-            <a:srgbClr val="00A896"/>
-          </a:solidFill>
-          <a:ln/>
-        </p:spPr>
-      </p:sp>
-      <p:pic>
-        <p:nvPicPr>
-          <p:cNvPr id="11" name="Image 2" descr="preencoded.png">    </p:cNvPr>
+          <p:cNvPr id="5" name="Image 0" descr="preencoded.png"/>
           <p:cNvPicPr>
             <a:picLocks noChangeAspect="1"/>
           </p:cNvPicPr>
@@ -3337,6 +2950,186 @@
         </p:blipFill>
         <p:spPr>
           <a:xfrm>
+            <a:off x="896112" y="1993392"/>
+            <a:ext cx="356616" cy="356616"/>
+          </a:xfrm>
+          <a:prstGeom prst="rect">
+            <a:avLst/>
+          </a:prstGeom>
+        </p:spPr>
+      </p:pic>
+      <p:sp>
+        <p:nvSpPr>
+          <p:cNvPr id="6" name="Text 3"/>
+          <p:cNvSpPr/>
+          <p:nvPr/>
+        </p:nvSpPr>
+        <p:spPr>
+          <a:xfrm>
+            <a:off x="1691640" y="1783080"/>
+            <a:ext cx="9326880" cy="822960"/>
+          </a:xfrm>
+          <a:prstGeom prst="rect">
+            <a:avLst/>
+          </a:prstGeom>
+          <a:noFill/>
+          <a:ln/>
+        </p:spPr>
+        <p:txBody>
+          <a:bodyPr wrap="square" rtlCol="0" anchor="ctr"/>
+          <a:lstStyle/>
+          <a:p>
+            <a:pPr marL="0" indent="0">
+              <a:buNone/>
+            </a:pPr>
+            <a:r>
+              <a:rPr lang="en-US" sz="1600" dirty="0">
+                <a:solidFill>
+                  <a:srgbClr val="E7F6F2"/>
+                </a:solidFill>
+                <a:latin typeface="Calibri" pitchFamily="34" charset="0"/>
+                <a:ea typeface="Calibri" pitchFamily="34" charset="-122"/>
+                <a:cs typeface="Calibri" pitchFamily="34" charset="-120"/>
+              </a:rPr>
+              <a:t>Functional testing checks if a feature works. Non-functional checks if it works well — speed, usability, security.</a:t>
+            </a:r>
+            <a:endParaRPr lang="en-US" sz="1600" dirty="0"/>
+          </a:p>
+        </p:txBody>
+      </p:sp>
+      <p:sp>
+        <p:nvSpPr>
+          <p:cNvPr id="7" name="Shape 4"/>
+          <p:cNvSpPr/>
+          <p:nvPr/>
+        </p:nvSpPr>
+        <p:spPr>
+          <a:xfrm>
+            <a:off x="731520" y="3154680"/>
+            <a:ext cx="685800" cy="685800"/>
+          </a:xfrm>
+          <a:prstGeom prst="ellipse">
+            <a:avLst/>
+          </a:prstGeom>
+          <a:solidFill>
+            <a:srgbClr val="00A896"/>
+          </a:solidFill>
+          <a:ln/>
+        </p:spPr>
+        <p:txBody>
+          <a:bodyPr/>
+          <a:lstStyle/>
+          <a:p>
+            <a:endParaRPr lang="en-US"/>
+          </a:p>
+        </p:txBody>
+      </p:sp>
+      <p:pic>
+        <p:nvPicPr>
+          <p:cNvPr id="8" name="Image 1" descr="preencoded.png"/>
+          <p:cNvPicPr>
+            <a:picLocks noChangeAspect="1"/>
+          </p:cNvPicPr>
+          <p:nvPr/>
+        </p:nvPicPr>
+        <p:blipFill>
+          <a:blip r:embed="rId4"/>
+          <a:stretch>
+            <a:fillRect/>
+          </a:stretch>
+        </p:blipFill>
+        <p:spPr>
+          <a:xfrm>
+            <a:off x="896112" y="3319272"/>
+            <a:ext cx="356616" cy="356616"/>
+          </a:xfrm>
+          <a:prstGeom prst="rect">
+            <a:avLst/>
+          </a:prstGeom>
+        </p:spPr>
+      </p:pic>
+      <p:sp>
+        <p:nvSpPr>
+          <p:cNvPr id="9" name="Text 5"/>
+          <p:cNvSpPr/>
+          <p:nvPr/>
+        </p:nvSpPr>
+        <p:spPr>
+          <a:xfrm>
+            <a:off x="1691640" y="3108960"/>
+            <a:ext cx="9326880" cy="822960"/>
+          </a:xfrm>
+          <a:prstGeom prst="rect">
+            <a:avLst/>
+          </a:prstGeom>
+          <a:noFill/>
+          <a:ln/>
+        </p:spPr>
+        <p:txBody>
+          <a:bodyPr wrap="square" rtlCol="0" anchor="ctr"/>
+          <a:lstStyle/>
+          <a:p>
+            <a:pPr marL="0" indent="0">
+              <a:buNone/>
+            </a:pPr>
+            <a:r>
+              <a:rPr lang="en-US" sz="1600" dirty="0">
+                <a:solidFill>
+                  <a:srgbClr val="E7F6F2"/>
+                </a:solidFill>
+                <a:latin typeface="Calibri" pitchFamily="34" charset="0"/>
+                <a:ea typeface="Calibri" pitchFamily="34" charset="-122"/>
+                <a:cs typeface="Calibri" pitchFamily="34" charset="-120"/>
+              </a:rPr>
+              <a:t>Black box testing is from the outside, like a real user — that's most of what you'll do as a junior QA tester.</a:t>
+            </a:r>
+            <a:endParaRPr lang="en-US" sz="1600" dirty="0"/>
+          </a:p>
+        </p:txBody>
+      </p:sp>
+      <p:sp>
+        <p:nvSpPr>
+          <p:cNvPr id="10" name="Shape 6"/>
+          <p:cNvSpPr/>
+          <p:nvPr/>
+        </p:nvSpPr>
+        <p:spPr>
+          <a:xfrm>
+            <a:off x="731520" y="4480560"/>
+            <a:ext cx="685800" cy="685800"/>
+          </a:xfrm>
+          <a:prstGeom prst="ellipse">
+            <a:avLst/>
+          </a:prstGeom>
+          <a:solidFill>
+            <a:srgbClr val="00A896"/>
+          </a:solidFill>
+          <a:ln/>
+        </p:spPr>
+        <p:txBody>
+          <a:bodyPr/>
+          <a:lstStyle/>
+          <a:p>
+            <a:endParaRPr lang="en-US"/>
+          </a:p>
+        </p:txBody>
+      </p:sp>
+      <p:pic>
+        <p:nvPicPr>
+          <p:cNvPr id="11" name="Image 2" descr="preencoded.png"/>
+          <p:cNvPicPr>
+            <a:picLocks noChangeAspect="1"/>
+          </p:cNvPicPr>
+          <p:nvPr/>
+        </p:nvPicPr>
+        <p:blipFill>
+          <a:blip r:embed="rId5"/>
+          <a:stretch>
+            <a:fillRect/>
+          </a:stretch>
+        </p:blipFill>
+        <p:spPr>
+          <a:xfrm>
             <a:off x="896112" y="4645152"/>
             <a:ext cx="356616" cy="356616"/>
           </a:xfrm>
@@ -3366,7 +3159,7 @@
           <a:bodyPr wrap="square" rtlCol="0" anchor="ctr"/>
           <a:lstStyle/>
           <a:p>
-            <a:pPr indent="0" marL="0">
+            <a:pPr marL="0" indent="0">
               <a:buNone/>
             </a:pPr>
             <a:r>
@@ -3405,7 +3198,7 @@
           <a:bodyPr wrap="square" rtlCol="0" anchor="ctr"/>
           <a:lstStyle/>
           <a:p>
-            <a:pPr algn="r" indent="0" marL="0">
+            <a:pPr marL="0" indent="0" algn="r">
               <a:buNone/>
             </a:pPr>
             <a:r>
@@ -3439,6 +3232,7 @@
         <a:solidFill>
           <a:srgbClr val="FFFFFF"/>
         </a:solidFill>
+        <a:effectLst/>
       </p:bgPr>
     </p:bg>
     <p:spTree>
@@ -3476,11 +3270,11 @@
           <a:bodyPr wrap="square" rtlCol="0" anchor="ctr"/>
           <a:lstStyle/>
           <a:p>
-            <a:pPr indent="0" marL="0">
-              <a:buNone/>
-            </a:pPr>
-            <a:r>
-              <a:rPr lang="en-US" sz="1300" b="1" spc="200" kern="0" dirty="0">
+            <a:pPr marL="0" indent="0">
+              <a:buNone/>
+            </a:pPr>
+            <a:r>
+              <a:rPr lang="en-US" sz="1300" b="1" kern="0" spc="200" dirty="0">
                 <a:solidFill>
                   <a:srgbClr val="00A896"/>
                 </a:solidFill>
@@ -3513,17 +3307,24 @@
           </a:solidFill>
           <a:ln/>
         </p:spPr>
+        <p:txBody>
+          <a:bodyPr/>
+          <a:lstStyle/>
+          <a:p>
+            <a:endParaRPr lang="en-US"/>
+          </a:p>
+        </p:txBody>
       </p:sp>
       <p:pic>
         <p:nvPicPr>
-          <p:cNvPr id="4" name="Image 0" descr="preencoded.png">    </p:cNvPr>
+          <p:cNvPr id="4" name="Image 0" descr="preencoded.png"/>
           <p:cNvPicPr>
             <a:picLocks noChangeAspect="1"/>
           </p:cNvPicPr>
           <p:nvPr/>
         </p:nvPicPr>
         <p:blipFill>
-          <a:blip r:embed="rId1"/>
+          <a:blip r:embed="rId3"/>
           <a:stretch>
             <a:fillRect/>
           </a:stretch>
@@ -3559,7 +3360,7 @@
           <a:bodyPr wrap="square" rtlCol="0" anchor="ctr"/>
           <a:lstStyle/>
           <a:p>
-            <a:pPr indent="0" marL="0">
+            <a:pPr marL="0" indent="0">
               <a:buNone/>
             </a:pPr>
             <a:r>
@@ -3598,6 +3399,13 @@
           </a:solidFill>
           <a:ln/>
         </p:spPr>
+        <p:txBody>
+          <a:bodyPr/>
+          <a:lstStyle/>
+          <a:p>
+            <a:endParaRPr lang="en-US"/>
+          </a:p>
+        </p:txBody>
       </p:sp>
       <p:sp>
         <p:nvSpPr>
@@ -3636,8 +3444,7 @@
                 <a:ea typeface="Calibri" pitchFamily="34" charset="-122"/>
                 <a:cs typeface="Calibri" pitchFamily="34" charset="-120"/>
               </a:rPr>
-              <a:t>Go back to your Week 1 exploratory notes.
-</a:t>
+              <a:t>Go back to your Week 1 exploratory notes.</a:t>
             </a:r>
             <a:endParaRPr lang="en-US" sz="1600" dirty="0"/>
           </a:p>
@@ -3658,8 +3465,7 @@
                 <a:ea typeface="Calibri" pitchFamily="34" charset="-122"/>
                 <a:cs typeface="Calibri" pitchFamily="34" charset="-120"/>
               </a:rPr>
-              <a:t>Label each finding as Functional or Non-Functional.
-</a:t>
+              <a:t>Label each finding as Functional or Non-Functional.</a:t>
             </a:r>
             <a:endParaRPr lang="en-US" sz="1600" dirty="0"/>
           </a:p>
@@ -3680,8 +3486,7 @@
                 <a:ea typeface="Calibri" pitchFamily="34" charset="-122"/>
                 <a:cs typeface="Calibri" pitchFamily="34" charset="-120"/>
               </a:rPr>
-              <a:t>Write one line explaining why for each.
-</a:t>
+              <a:t>Write one line explaining why for each.</a:t>
             </a:r>
             <a:endParaRPr lang="en-US" sz="1600" dirty="0"/>
           </a:p>
@@ -3702,8 +3507,18 @@
                 <a:ea typeface="Calibri" pitchFamily="34" charset="-122"/>
                 <a:cs typeface="Calibri" pitchFamily="34" charset="-120"/>
               </a:rPr>
-              <a:t>Bring these along next session — we'll turn them into test cases.
-</a:t>
+              <a:t>Bring these along next session — we'll turn them into test </a:t>
+            </a:r>
+            <a:r>
+              <a:rPr lang="en-US" sz="1600">
+                <a:solidFill>
+                  <a:srgbClr val="1B2B2B"/>
+                </a:solidFill>
+                <a:latin typeface="Calibri" pitchFamily="34" charset="0"/>
+                <a:ea typeface="Calibri" pitchFamily="34" charset="-122"/>
+                <a:cs typeface="Calibri" pitchFamily="34" charset="-120"/>
+              </a:rPr>
+              <a:t>cases.</a:t>
             </a:r>
             <a:endParaRPr lang="en-US" sz="1600" dirty="0"/>
           </a:p>
@@ -3751,7 +3566,7 @@
           <a:bodyPr wrap="square" rtlCol="0" anchor="ctr"/>
           <a:lstStyle/>
           <a:p>
-            <a:pPr algn="r" indent="0" marL="0">
+            <a:pPr marL="0" indent="0" algn="r">
               <a:buNone/>
             </a:pPr>
             <a:r>
@@ -3785,6 +3600,7 @@
         <a:solidFill>
           <a:srgbClr val="FFFFFF"/>
         </a:solidFill>
+        <a:effectLst/>
       </p:bgPr>
     </p:bg>
     <p:spTree>
@@ -3822,11 +3638,11 @@
           <a:bodyPr wrap="square" rtlCol="0" anchor="ctr"/>
           <a:lstStyle/>
           <a:p>
-            <a:pPr indent="0" marL="0">
-              <a:buNone/>
-            </a:pPr>
-            <a:r>
-              <a:rPr lang="en-US" sz="1300" b="1" spc="200" kern="0" dirty="0">
+            <a:pPr marL="0" indent="0">
+              <a:buNone/>
+            </a:pPr>
+            <a:r>
+              <a:rPr lang="en-US" sz="1300" b="1" kern="0" spc="200" dirty="0">
                 <a:solidFill>
                   <a:srgbClr val="00A896"/>
                 </a:solidFill>
@@ -3859,298 +3675,17 @@
           </a:solidFill>
           <a:ln/>
         </p:spPr>
+        <p:txBody>
+          <a:bodyPr/>
+          <a:lstStyle/>
+          <a:p>
+            <a:endParaRPr lang="en-US"/>
+          </a:p>
+        </p:txBody>
       </p:sp>
       <p:pic>
         <p:nvPicPr>
-          <p:cNvPr id="4" name="Image 0" descr="preencoded.png">    </p:cNvPr>
-          <p:cNvPicPr>
-            <a:picLocks noChangeAspect="1"/>
-          </p:cNvPicPr>
-          <p:nvPr/>
-        </p:nvPicPr>
-        <p:blipFill>
-          <a:blip r:embed="rId1"/>
-          <a:stretch>
-            <a:fillRect/>
-          </a:stretch>
-        </p:blipFill>
-        <p:spPr>
-          <a:xfrm>
-            <a:off x="859536" y="1088136"/>
-            <a:ext cx="475488" cy="475488"/>
-          </a:xfrm>
-          <a:prstGeom prst="rect">
-            <a:avLst/>
-          </a:prstGeom>
-        </p:spPr>
-      </p:pic>
-      <p:sp>
-        <p:nvSpPr>
-          <p:cNvPr id="5" name="Text 2"/>
-          <p:cNvSpPr/>
-          <p:nvPr/>
-        </p:nvSpPr>
-        <p:spPr>
-          <a:xfrm>
-            <a:off x="1737360" y="1051560"/>
-            <a:ext cx="8686800" cy="640080"/>
-          </a:xfrm>
-          <a:prstGeom prst="rect">
-            <a:avLst/>
-          </a:prstGeom>
-          <a:noFill/>
-          <a:ln/>
-        </p:spPr>
-        <p:txBody>
-          <a:bodyPr wrap="square" rtlCol="0" anchor="ctr"/>
-          <a:lstStyle/>
-          <a:p>
-            <a:pPr indent="0" marL="0">
-              <a:buNone/>
-            </a:pPr>
-            <a:r>
-              <a:rPr lang="en-US" sz="2800" b="1" dirty="0">
-                <a:solidFill>
-                  <a:srgbClr val="1B2B2B"/>
-                </a:solidFill>
-                <a:latin typeface="Cambria" pitchFamily="34" charset="0"/>
-                <a:ea typeface="Cambria" pitchFamily="34" charset="-122"/>
-                <a:cs typeface="Cambria" pitchFamily="34" charset="-120"/>
-              </a:rPr>
-              <a:t>Your Week 2 Student Guide</a:t>
-            </a:r>
-            <a:endParaRPr lang="en-US" sz="2800" dirty="0"/>
-          </a:p>
-        </p:txBody>
-      </p:sp>
-      <p:sp>
-        <p:nvSpPr>
-          <p:cNvPr id="6" name="Text 3"/>
-          <p:cNvSpPr/>
-          <p:nvPr/>
-        </p:nvSpPr>
-        <p:spPr>
-          <a:xfrm>
-            <a:off x="1737360" y="1554480"/>
-            <a:ext cx="8686800" cy="365760"/>
-          </a:xfrm>
-          <a:prstGeom prst="rect">
-            <a:avLst/>
-          </a:prstGeom>
-          <a:noFill/>
-          <a:ln/>
-        </p:spPr>
-        <p:txBody>
-          <a:bodyPr wrap="square" rtlCol="0" anchor="ctr"/>
-          <a:lstStyle/>
-          <a:p>
-            <a:pPr indent="0" marL="0">
-              <a:buNone/>
-            </a:pPr>
-            <a:r>
-              <a:rPr lang="en-US" sz="1400" i="1" dirty="0">
-                <a:solidFill>
-                  <a:srgbClr val="5A6B6B"/>
-                </a:solidFill>
-                <a:latin typeface="Calibri" pitchFamily="34" charset="0"/>
-                <a:ea typeface="Calibri" pitchFamily="34" charset="-122"/>
-                <a:cs typeface="Calibri" pitchFamily="34" charset="-120"/>
-              </a:rPr>
-              <a:t>Everything from this week lives in one place — worth bookmarking.</a:t>
-            </a:r>
-            <a:endParaRPr lang="en-US" sz="1400" dirty="0"/>
-          </a:p>
-        </p:txBody>
-      </p:sp>
-      <p:sp>
-        <p:nvSpPr>
-          <p:cNvPr id="7" name="Shape 4"/>
-          <p:cNvSpPr/>
-          <p:nvPr/>
-        </p:nvSpPr>
-        <p:spPr>
-          <a:xfrm>
-            <a:off x="640080" y="2286000"/>
-            <a:ext cx="10424160" cy="1143000"/>
-          </a:xfrm>
-          <a:prstGeom prst="roundRect">
-            <a:avLst>
-              <a:gd name="adj" fmla="val 9600"/>
-            </a:avLst>
-          </a:prstGeom>
-          <a:solidFill>
-            <a:srgbClr val="F2F7F7"/>
-          </a:solidFill>
-          <a:ln/>
-        </p:spPr>
-      </p:sp>
-      <p:sp>
-        <p:nvSpPr>
-          <p:cNvPr id="8" name="Shape 5"/>
-          <p:cNvSpPr/>
-          <p:nvPr/>
-        </p:nvSpPr>
-        <p:spPr>
-          <a:xfrm>
-            <a:off x="914400" y="2487168"/>
-            <a:ext cx="731520" cy="731520"/>
-          </a:xfrm>
-          <a:prstGeom prst="ellipse">
-            <a:avLst/>
-          </a:prstGeom>
-          <a:solidFill>
-            <a:srgbClr val="00A896"/>
-          </a:solidFill>
-          <a:ln/>
-        </p:spPr>
-      </p:sp>
-      <p:pic>
-        <p:nvPicPr>
-          <p:cNvPr id="9" name="Image 1" descr="preencoded.png">    </p:cNvPr>
-          <p:cNvPicPr>
-            <a:picLocks noChangeAspect="1"/>
-          </p:cNvPicPr>
-          <p:nvPr/>
-        </p:nvPicPr>
-        <p:blipFill>
-          <a:blip r:embed="rId2"/>
-          <a:stretch>
-            <a:fillRect/>
-          </a:stretch>
-        </p:blipFill>
-        <p:spPr>
-          <a:xfrm>
-            <a:off x="1089965" y="2662733"/>
-            <a:ext cx="380390" cy="380390"/>
-          </a:xfrm>
-          <a:prstGeom prst="rect">
-            <a:avLst/>
-          </a:prstGeom>
-        </p:spPr>
-      </p:pic>
-      <p:sp>
-        <p:nvSpPr>
-          <p:cNvPr id="10" name="Text 6"/>
-          <p:cNvSpPr/>
-          <p:nvPr/>
-        </p:nvSpPr>
-        <p:spPr>
-          <a:xfrm>
-            <a:off x="1874520" y="2423160"/>
-            <a:ext cx="8869680" cy="365760"/>
-          </a:xfrm>
-          <a:prstGeom prst="rect">
-            <a:avLst/>
-          </a:prstGeom>
-          <a:noFill/>
-          <a:ln/>
-        </p:spPr>
-        <p:txBody>
-          <a:bodyPr wrap="square" rtlCol="0" anchor="ctr"/>
-          <a:lstStyle/>
-          <a:p>
-            <a:pPr indent="0" marL="0">
-              <a:buNone/>
-            </a:pPr>
-            <a:r>
-              <a:rPr lang="en-US" sz="1600" b="1" dirty="0">
-                <a:solidFill>
-                  <a:srgbClr val="1B2B2B"/>
-                </a:solidFill>
-                <a:latin typeface="Calibri" pitchFamily="34" charset="0"/>
-                <a:ea typeface="Calibri" pitchFamily="34" charset="-122"/>
-                <a:cs typeface="Calibri" pitchFamily="34" charset="-120"/>
-              </a:rPr>
-              <a:t>Part 1 &amp; 2 — Today's Content</a:t>
-            </a:r>
-            <a:endParaRPr lang="en-US" sz="1600" dirty="0"/>
-          </a:p>
-        </p:txBody>
-      </p:sp>
-      <p:sp>
-        <p:nvSpPr>
-          <p:cNvPr id="11" name="Text 7"/>
-          <p:cNvSpPr/>
-          <p:nvPr/>
-        </p:nvSpPr>
-        <p:spPr>
-          <a:xfrm>
-            <a:off x="1874520" y="2816352"/>
-            <a:ext cx="8869680" cy="502920"/>
-          </a:xfrm>
-          <a:prstGeom prst="rect">
-            <a:avLst/>
-          </a:prstGeom>
-          <a:noFill/>
-          <a:ln/>
-        </p:spPr>
-        <p:txBody>
-          <a:bodyPr wrap="square" rtlCol="0" anchor="ctr"/>
-          <a:lstStyle/>
-          <a:p>
-            <a:pPr indent="0" marL="0">
-              <a:buNone/>
-            </a:pPr>
-            <a:r>
-              <a:rPr lang="en-US" sz="1300" dirty="0">
-                <a:solidFill>
-                  <a:srgbClr val="5A6B6B"/>
-                </a:solidFill>
-                <a:latin typeface="Calibri" pitchFamily="34" charset="0"/>
-                <a:ea typeface="Calibri" pitchFamily="34" charset="-122"/>
-                <a:cs typeface="Calibri" pitchFamily="34" charset="-120"/>
-              </a:rPr>
-              <a:t>Functional vs non-functional, black box vs white box, with examples.</a:t>
-            </a:r>
-            <a:endParaRPr lang="en-US" sz="1300" dirty="0"/>
-          </a:p>
-        </p:txBody>
-      </p:sp>
-      <p:sp>
-        <p:nvSpPr>
-          <p:cNvPr id="12" name="Shape 8"/>
-          <p:cNvSpPr/>
-          <p:nvPr/>
-        </p:nvSpPr>
-        <p:spPr>
-          <a:xfrm>
-            <a:off x="640080" y="3611880"/>
-            <a:ext cx="10424160" cy="1143000"/>
-          </a:xfrm>
-          <a:prstGeom prst="roundRect">
-            <a:avLst>
-              <a:gd name="adj" fmla="val 9600"/>
-            </a:avLst>
-          </a:prstGeom>
-          <a:solidFill>
-            <a:srgbClr val="F2F7F7"/>
-          </a:solidFill>
-          <a:ln/>
-        </p:spPr>
-      </p:sp>
-      <p:sp>
-        <p:nvSpPr>
-          <p:cNvPr id="13" name="Shape 9"/>
-          <p:cNvSpPr/>
-          <p:nvPr/>
-        </p:nvSpPr>
-        <p:spPr>
-          <a:xfrm>
-            <a:off x="914400" y="3813048"/>
-            <a:ext cx="731520" cy="731520"/>
-          </a:xfrm>
-          <a:prstGeom prst="ellipse">
-            <a:avLst/>
-          </a:prstGeom>
-          <a:solidFill>
-            <a:srgbClr val="00A896"/>
-          </a:solidFill>
-          <a:ln/>
-        </p:spPr>
-      </p:sp>
-      <p:pic>
-        <p:nvPicPr>
-          <p:cNvPr id="14" name="Image 2" descr="preencoded.png">    </p:cNvPr>
+          <p:cNvPr id="4" name="Image 0" descr="preencoded.png"/>
           <p:cNvPicPr>
             <a:picLocks noChangeAspect="1"/>
           </p:cNvPicPr>
@@ -4164,8 +3699,8 @@
         </p:blipFill>
         <p:spPr>
           <a:xfrm>
-            <a:off x="1089965" y="3988613"/>
-            <a:ext cx="380390" cy="380390"/>
+            <a:off x="859536" y="1088136"/>
+            <a:ext cx="475488" cy="475488"/>
           </a:xfrm>
           <a:prstGeom prst="rect">
             <a:avLst/>
@@ -4174,69 +3709,69 @@
       </p:pic>
       <p:sp>
         <p:nvSpPr>
-          <p:cNvPr id="15" name="Text 10"/>
-          <p:cNvSpPr/>
-          <p:nvPr/>
-        </p:nvSpPr>
-        <p:spPr>
-          <a:xfrm>
-            <a:off x="1874520" y="3749040"/>
-            <a:ext cx="8869680" cy="365760"/>
-          </a:xfrm>
-          <a:prstGeom prst="rect">
-            <a:avLst/>
-          </a:prstGeom>
-          <a:noFill/>
-          <a:ln/>
-        </p:spPr>
-        <p:txBody>
-          <a:bodyPr wrap="square" rtlCol="0" anchor="ctr"/>
-          <a:lstStyle/>
-          <a:p>
-            <a:pPr indent="0" marL="0">
-              <a:buNone/>
-            </a:pPr>
-            <a:r>
-              <a:rPr lang="en-US" sz="1600" b="1" dirty="0">
+          <p:cNvPr id="5" name="Text 2"/>
+          <p:cNvSpPr/>
+          <p:nvPr/>
+        </p:nvSpPr>
+        <p:spPr>
+          <a:xfrm>
+            <a:off x="1737360" y="1051560"/>
+            <a:ext cx="8686800" cy="640080"/>
+          </a:xfrm>
+          <a:prstGeom prst="rect">
+            <a:avLst/>
+          </a:prstGeom>
+          <a:noFill/>
+          <a:ln/>
+        </p:spPr>
+        <p:txBody>
+          <a:bodyPr wrap="square" rtlCol="0" anchor="ctr"/>
+          <a:lstStyle/>
+          <a:p>
+            <a:pPr marL="0" indent="0">
+              <a:buNone/>
+            </a:pPr>
+            <a:r>
+              <a:rPr lang="en-US" sz="2800" b="1" dirty="0">
                 <a:solidFill>
                   <a:srgbClr val="1B2B2B"/>
                 </a:solidFill>
-                <a:latin typeface="Calibri" pitchFamily="34" charset="0"/>
-                <a:ea typeface="Calibri" pitchFamily="34" charset="-122"/>
-                <a:cs typeface="Calibri" pitchFamily="34" charset="-120"/>
-              </a:rPr>
-              <a:t>Part 3 — QA Vocabulary</a:t>
-            </a:r>
-            <a:endParaRPr lang="en-US" sz="1600" dirty="0"/>
-          </a:p>
-        </p:txBody>
-      </p:sp>
-      <p:sp>
-        <p:nvSpPr>
-          <p:cNvPr id="16" name="Text 11"/>
-          <p:cNvSpPr/>
-          <p:nvPr/>
-        </p:nvSpPr>
-        <p:spPr>
-          <a:xfrm>
-            <a:off x="1874520" y="4142232"/>
-            <a:ext cx="8869680" cy="502920"/>
-          </a:xfrm>
-          <a:prstGeom prst="rect">
-            <a:avLst/>
-          </a:prstGeom>
-          <a:noFill/>
-          <a:ln/>
-        </p:spPr>
-        <p:txBody>
-          <a:bodyPr wrap="square" rtlCol="0" anchor="ctr"/>
-          <a:lstStyle/>
-          <a:p>
-            <a:pPr indent="0" marL="0">
-              <a:buNone/>
-            </a:pPr>
-            <a:r>
-              <a:rPr lang="en-US" sz="1300" dirty="0">
+                <a:latin typeface="Cambria" pitchFamily="34" charset="0"/>
+                <a:ea typeface="Cambria" pitchFamily="34" charset="-122"/>
+                <a:cs typeface="Cambria" pitchFamily="34" charset="-120"/>
+              </a:rPr>
+              <a:t>Your Week 2 Student Guide</a:t>
+            </a:r>
+            <a:endParaRPr lang="en-US" sz="2800" dirty="0"/>
+          </a:p>
+        </p:txBody>
+      </p:sp>
+      <p:sp>
+        <p:nvSpPr>
+          <p:cNvPr id="6" name="Text 3"/>
+          <p:cNvSpPr/>
+          <p:nvPr/>
+        </p:nvSpPr>
+        <p:spPr>
+          <a:xfrm>
+            <a:off x="1737360" y="1554480"/>
+            <a:ext cx="8686800" cy="365760"/>
+          </a:xfrm>
+          <a:prstGeom prst="rect">
+            <a:avLst/>
+          </a:prstGeom>
+          <a:noFill/>
+          <a:ln/>
+        </p:spPr>
+        <p:txBody>
+          <a:bodyPr wrap="square" rtlCol="0" anchor="ctr"/>
+          <a:lstStyle/>
+          <a:p>
+            <a:pPr marL="0" indent="0">
+              <a:buNone/>
+            </a:pPr>
+            <a:r>
+              <a:rPr lang="en-US" sz="1400" i="1" dirty="0">
                 <a:solidFill>
                   <a:srgbClr val="5A6B6B"/>
                 </a:solidFill>
@@ -4244,21 +3779,21 @@
                 <a:ea typeface="Calibri" pitchFamily="34" charset="-122"/>
                 <a:cs typeface="Calibri" pitchFamily="34" charset="-120"/>
               </a:rPr>
-              <a:t>BRD, feature, user story, scenario, test scenario, test story, test case, and test plan — with a full worked example.</a:t>
-            </a:r>
-            <a:endParaRPr lang="en-US" sz="1300" dirty="0"/>
-          </a:p>
-        </p:txBody>
-      </p:sp>
-      <p:sp>
-        <p:nvSpPr>
-          <p:cNvPr id="17" name="Shape 12"/>
-          <p:cNvSpPr/>
-          <p:nvPr/>
-        </p:nvSpPr>
-        <p:spPr>
-          <a:xfrm>
-            <a:off x="640080" y="4937760"/>
+              <a:t>Everything from this week lives in one place — worth bookmarking.</a:t>
+            </a:r>
+            <a:endParaRPr lang="en-US" sz="1400" dirty="0"/>
+          </a:p>
+        </p:txBody>
+      </p:sp>
+      <p:sp>
+        <p:nvSpPr>
+          <p:cNvPr id="7" name="Shape 4"/>
+          <p:cNvSpPr/>
+          <p:nvPr/>
+        </p:nvSpPr>
+        <p:spPr>
+          <a:xfrm>
+            <a:off x="640080" y="2286000"/>
             <a:ext cx="10424160" cy="1143000"/>
           </a:xfrm>
           <a:prstGeom prst="roundRect">
@@ -4271,16 +3806,23 @@
           </a:solidFill>
           <a:ln/>
         </p:spPr>
-      </p:sp>
-      <p:sp>
-        <p:nvSpPr>
-          <p:cNvPr id="18" name="Shape 13"/>
-          <p:cNvSpPr/>
-          <p:nvPr/>
-        </p:nvSpPr>
-        <p:spPr>
-          <a:xfrm>
-            <a:off x="914400" y="5138928"/>
+        <p:txBody>
+          <a:bodyPr/>
+          <a:lstStyle/>
+          <a:p>
+            <a:endParaRPr lang="en-US"/>
+          </a:p>
+        </p:txBody>
+      </p:sp>
+      <p:sp>
+        <p:nvSpPr>
+          <p:cNvPr id="8" name="Shape 5"/>
+          <p:cNvSpPr/>
+          <p:nvPr/>
+        </p:nvSpPr>
+        <p:spPr>
+          <a:xfrm>
+            <a:off x="914400" y="2487168"/>
             <a:ext cx="731520" cy="731520"/>
           </a:xfrm>
           <a:prstGeom prst="ellipse">
@@ -4291,10 +3833,17 @@
           </a:solidFill>
           <a:ln/>
         </p:spPr>
+        <p:txBody>
+          <a:bodyPr/>
+          <a:lstStyle/>
+          <a:p>
+            <a:endParaRPr lang="en-US"/>
+          </a:p>
+        </p:txBody>
       </p:sp>
       <p:pic>
         <p:nvPicPr>
-          <p:cNvPr id="19" name="Image 3" descr="preencoded.png">    </p:cNvPr>
+          <p:cNvPr id="9" name="Image 1" descr="preencoded.png"/>
           <p:cNvPicPr>
             <a:picLocks noChangeAspect="1"/>
           </p:cNvPicPr>
@@ -4308,6 +3857,322 @@
         </p:blipFill>
         <p:spPr>
           <a:xfrm>
+            <a:off x="1089965" y="2662733"/>
+            <a:ext cx="380390" cy="380390"/>
+          </a:xfrm>
+          <a:prstGeom prst="rect">
+            <a:avLst/>
+          </a:prstGeom>
+        </p:spPr>
+      </p:pic>
+      <p:sp>
+        <p:nvSpPr>
+          <p:cNvPr id="10" name="Text 6"/>
+          <p:cNvSpPr/>
+          <p:nvPr/>
+        </p:nvSpPr>
+        <p:spPr>
+          <a:xfrm>
+            <a:off x="1874520" y="2423160"/>
+            <a:ext cx="8869680" cy="365760"/>
+          </a:xfrm>
+          <a:prstGeom prst="rect">
+            <a:avLst/>
+          </a:prstGeom>
+          <a:noFill/>
+          <a:ln/>
+        </p:spPr>
+        <p:txBody>
+          <a:bodyPr wrap="square" rtlCol="0" anchor="ctr"/>
+          <a:lstStyle/>
+          <a:p>
+            <a:pPr marL="0" indent="0">
+              <a:buNone/>
+            </a:pPr>
+            <a:r>
+              <a:rPr lang="en-US" sz="1600" b="1" dirty="0">
+                <a:solidFill>
+                  <a:srgbClr val="1B2B2B"/>
+                </a:solidFill>
+                <a:latin typeface="Calibri" pitchFamily="34" charset="0"/>
+                <a:ea typeface="Calibri" pitchFamily="34" charset="-122"/>
+                <a:cs typeface="Calibri" pitchFamily="34" charset="-120"/>
+              </a:rPr>
+              <a:t>Part 1 &amp; 2 — Today's Content</a:t>
+            </a:r>
+            <a:endParaRPr lang="en-US" sz="1600" dirty="0"/>
+          </a:p>
+        </p:txBody>
+      </p:sp>
+      <p:sp>
+        <p:nvSpPr>
+          <p:cNvPr id="11" name="Text 7"/>
+          <p:cNvSpPr/>
+          <p:nvPr/>
+        </p:nvSpPr>
+        <p:spPr>
+          <a:xfrm>
+            <a:off x="1874520" y="2816352"/>
+            <a:ext cx="8869680" cy="502920"/>
+          </a:xfrm>
+          <a:prstGeom prst="rect">
+            <a:avLst/>
+          </a:prstGeom>
+          <a:noFill/>
+          <a:ln/>
+        </p:spPr>
+        <p:txBody>
+          <a:bodyPr wrap="square" rtlCol="0" anchor="ctr"/>
+          <a:lstStyle/>
+          <a:p>
+            <a:pPr marL="0" indent="0">
+              <a:buNone/>
+            </a:pPr>
+            <a:r>
+              <a:rPr lang="en-US" sz="1300" dirty="0">
+                <a:solidFill>
+                  <a:srgbClr val="5A6B6B"/>
+                </a:solidFill>
+                <a:latin typeface="Calibri" pitchFamily="34" charset="0"/>
+                <a:ea typeface="Calibri" pitchFamily="34" charset="-122"/>
+                <a:cs typeface="Calibri" pitchFamily="34" charset="-120"/>
+              </a:rPr>
+              <a:t>Functional vs non-functional, black box vs white box, with examples.</a:t>
+            </a:r>
+            <a:endParaRPr lang="en-US" sz="1300" dirty="0"/>
+          </a:p>
+        </p:txBody>
+      </p:sp>
+      <p:sp>
+        <p:nvSpPr>
+          <p:cNvPr id="12" name="Shape 8"/>
+          <p:cNvSpPr/>
+          <p:nvPr/>
+        </p:nvSpPr>
+        <p:spPr>
+          <a:xfrm>
+            <a:off x="640080" y="3611880"/>
+            <a:ext cx="10424160" cy="1143000"/>
+          </a:xfrm>
+          <a:prstGeom prst="roundRect">
+            <a:avLst>
+              <a:gd name="adj" fmla="val 9600"/>
+            </a:avLst>
+          </a:prstGeom>
+          <a:solidFill>
+            <a:srgbClr val="F2F7F7"/>
+          </a:solidFill>
+          <a:ln/>
+        </p:spPr>
+        <p:txBody>
+          <a:bodyPr/>
+          <a:lstStyle/>
+          <a:p>
+            <a:endParaRPr lang="en-US"/>
+          </a:p>
+        </p:txBody>
+      </p:sp>
+      <p:sp>
+        <p:nvSpPr>
+          <p:cNvPr id="13" name="Shape 9"/>
+          <p:cNvSpPr/>
+          <p:nvPr/>
+        </p:nvSpPr>
+        <p:spPr>
+          <a:xfrm>
+            <a:off x="914400" y="3813048"/>
+            <a:ext cx="731520" cy="731520"/>
+          </a:xfrm>
+          <a:prstGeom prst="ellipse">
+            <a:avLst/>
+          </a:prstGeom>
+          <a:solidFill>
+            <a:srgbClr val="00A896"/>
+          </a:solidFill>
+          <a:ln/>
+        </p:spPr>
+        <p:txBody>
+          <a:bodyPr/>
+          <a:lstStyle/>
+          <a:p>
+            <a:endParaRPr lang="en-US"/>
+          </a:p>
+        </p:txBody>
+      </p:sp>
+      <p:pic>
+        <p:nvPicPr>
+          <p:cNvPr id="14" name="Image 2" descr="preencoded.png"/>
+          <p:cNvPicPr>
+            <a:picLocks noChangeAspect="1"/>
+          </p:cNvPicPr>
+          <p:nvPr/>
+        </p:nvPicPr>
+        <p:blipFill>
+          <a:blip r:embed="rId5"/>
+          <a:stretch>
+            <a:fillRect/>
+          </a:stretch>
+        </p:blipFill>
+        <p:spPr>
+          <a:xfrm>
+            <a:off x="1089965" y="3988613"/>
+            <a:ext cx="380390" cy="380390"/>
+          </a:xfrm>
+          <a:prstGeom prst="rect">
+            <a:avLst/>
+          </a:prstGeom>
+        </p:spPr>
+      </p:pic>
+      <p:sp>
+        <p:nvSpPr>
+          <p:cNvPr id="15" name="Text 10"/>
+          <p:cNvSpPr/>
+          <p:nvPr/>
+        </p:nvSpPr>
+        <p:spPr>
+          <a:xfrm>
+            <a:off x="1874520" y="3749040"/>
+            <a:ext cx="8869680" cy="365760"/>
+          </a:xfrm>
+          <a:prstGeom prst="rect">
+            <a:avLst/>
+          </a:prstGeom>
+          <a:noFill/>
+          <a:ln/>
+        </p:spPr>
+        <p:txBody>
+          <a:bodyPr wrap="square" rtlCol="0" anchor="ctr"/>
+          <a:lstStyle/>
+          <a:p>
+            <a:pPr marL="0" indent="0">
+              <a:buNone/>
+            </a:pPr>
+            <a:r>
+              <a:rPr lang="en-US" sz="1600" b="1" dirty="0">
+                <a:solidFill>
+                  <a:srgbClr val="1B2B2B"/>
+                </a:solidFill>
+                <a:latin typeface="Calibri" pitchFamily="34" charset="0"/>
+                <a:ea typeface="Calibri" pitchFamily="34" charset="-122"/>
+                <a:cs typeface="Calibri" pitchFamily="34" charset="-120"/>
+              </a:rPr>
+              <a:t>Part 3 — QA Vocabulary</a:t>
+            </a:r>
+            <a:endParaRPr lang="en-US" sz="1600" dirty="0"/>
+          </a:p>
+        </p:txBody>
+      </p:sp>
+      <p:sp>
+        <p:nvSpPr>
+          <p:cNvPr id="16" name="Text 11"/>
+          <p:cNvSpPr/>
+          <p:nvPr/>
+        </p:nvSpPr>
+        <p:spPr>
+          <a:xfrm>
+            <a:off x="1874520" y="4142232"/>
+            <a:ext cx="8869680" cy="502920"/>
+          </a:xfrm>
+          <a:prstGeom prst="rect">
+            <a:avLst/>
+          </a:prstGeom>
+          <a:noFill/>
+          <a:ln/>
+        </p:spPr>
+        <p:txBody>
+          <a:bodyPr wrap="square" rtlCol="0" anchor="ctr"/>
+          <a:lstStyle/>
+          <a:p>
+            <a:pPr marL="0" indent="0">
+              <a:buNone/>
+            </a:pPr>
+            <a:r>
+              <a:rPr lang="en-US" sz="1300" dirty="0">
+                <a:solidFill>
+                  <a:srgbClr val="5A6B6B"/>
+                </a:solidFill>
+                <a:latin typeface="Calibri" pitchFamily="34" charset="0"/>
+                <a:ea typeface="Calibri" pitchFamily="34" charset="-122"/>
+                <a:cs typeface="Calibri" pitchFamily="34" charset="-120"/>
+              </a:rPr>
+              <a:t>BRD, feature, user story, scenario, test scenario, test story, test case, and test plan — with a full worked example.</a:t>
+            </a:r>
+            <a:endParaRPr lang="en-US" sz="1300" dirty="0"/>
+          </a:p>
+        </p:txBody>
+      </p:sp>
+      <p:sp>
+        <p:nvSpPr>
+          <p:cNvPr id="17" name="Shape 12"/>
+          <p:cNvSpPr/>
+          <p:nvPr/>
+        </p:nvSpPr>
+        <p:spPr>
+          <a:xfrm>
+            <a:off x="640080" y="4937760"/>
+            <a:ext cx="10424160" cy="1143000"/>
+          </a:xfrm>
+          <a:prstGeom prst="roundRect">
+            <a:avLst>
+              <a:gd name="adj" fmla="val 9600"/>
+            </a:avLst>
+          </a:prstGeom>
+          <a:solidFill>
+            <a:srgbClr val="F2F7F7"/>
+          </a:solidFill>
+          <a:ln/>
+        </p:spPr>
+        <p:txBody>
+          <a:bodyPr/>
+          <a:lstStyle/>
+          <a:p>
+            <a:endParaRPr lang="en-US"/>
+          </a:p>
+        </p:txBody>
+      </p:sp>
+      <p:sp>
+        <p:nvSpPr>
+          <p:cNvPr id="18" name="Shape 13"/>
+          <p:cNvSpPr/>
+          <p:nvPr/>
+        </p:nvSpPr>
+        <p:spPr>
+          <a:xfrm>
+            <a:off x="914400" y="5138928"/>
+            <a:ext cx="731520" cy="731520"/>
+          </a:xfrm>
+          <a:prstGeom prst="ellipse">
+            <a:avLst/>
+          </a:prstGeom>
+          <a:solidFill>
+            <a:srgbClr val="00A896"/>
+          </a:solidFill>
+          <a:ln/>
+        </p:spPr>
+        <p:txBody>
+          <a:bodyPr/>
+          <a:lstStyle/>
+          <a:p>
+            <a:endParaRPr lang="en-US"/>
+          </a:p>
+        </p:txBody>
+      </p:sp>
+      <p:pic>
+        <p:nvPicPr>
+          <p:cNvPr id="19" name="Image 3" descr="preencoded.png"/>
+          <p:cNvPicPr>
+            <a:picLocks noChangeAspect="1"/>
+          </p:cNvPicPr>
+          <p:nvPr/>
+        </p:nvPicPr>
+        <p:blipFill>
+          <a:blip r:embed="rId6"/>
+          <a:stretch>
+            <a:fillRect/>
+          </a:stretch>
+        </p:blipFill>
+        <p:spPr>
+          <a:xfrm>
             <a:off x="1089965" y="5314493"/>
             <a:ext cx="380390" cy="380390"/>
           </a:xfrm>
@@ -4337,7 +4202,7 @@
           <a:bodyPr wrap="square" rtlCol="0" anchor="ctr"/>
           <a:lstStyle/>
           <a:p>
-            <a:pPr indent="0" marL="0">
+            <a:pPr marL="0" indent="0">
               <a:buNone/>
             </a:pPr>
             <a:r>
@@ -4376,7 +4241,7 @@
           <a:bodyPr wrap="square" rtlCol="0" anchor="ctr"/>
           <a:lstStyle/>
           <a:p>
-            <a:pPr indent="0" marL="0">
+            <a:pPr marL="0" indent="0">
               <a:buNone/>
             </a:pPr>
             <a:r>
@@ -4415,7 +4280,7 @@
           <a:bodyPr wrap="square" rtlCol="0" anchor="ctr"/>
           <a:lstStyle/>
           <a:p>
-            <a:pPr algn="r" indent="0" marL="0">
+            <a:pPr marL="0" indent="0" algn="r">
               <a:buNone/>
             </a:pPr>
             <a:r>
@@ -4449,6 +4314,7 @@
         <a:solidFill>
           <a:srgbClr val="013A40"/>
         </a:solidFill>
+        <a:effectLst/>
       </p:bgPr>
     </p:bg>
     <p:spTree>
@@ -4467,14 +4333,14 @@
       </p:grpSpPr>
       <p:pic>
         <p:nvPicPr>
-          <p:cNvPr id="2" name="Image 0" descr="preencoded.png">    </p:cNvPr>
+          <p:cNvPr id="2" name="Image 0" descr="preencoded.png"/>
           <p:cNvPicPr>
             <a:picLocks noChangeAspect="1"/>
           </p:cNvPicPr>
           <p:nvPr/>
         </p:nvPicPr>
         <p:blipFill>
-          <a:blip r:embed="rId1">
+          <a:blip r:embed="rId3">
             <a:alphaModFix amt="12000"/>
           </a:blip>
           <a:stretch>
@@ -4512,11 +4378,11 @@
           <a:bodyPr wrap="square" rtlCol="0" anchor="ctr"/>
           <a:lstStyle/>
           <a:p>
-            <a:pPr indent="0" marL="0">
-              <a:buNone/>
-            </a:pPr>
-            <a:r>
-              <a:rPr lang="en-US" sz="1300" b="1" spc="200" kern="0" dirty="0">
+            <a:pPr marL="0" indent="0">
+              <a:buNone/>
+            </a:pPr>
+            <a:r>
+              <a:rPr lang="en-US" sz="1300" b="1" kern="0" spc="200" dirty="0">
                 <a:solidFill>
                   <a:srgbClr val="02C39A"/>
                 </a:solidFill>
@@ -4551,7 +4417,7 @@
           <a:bodyPr wrap="square" rtlCol="0" anchor="ctr"/>
           <a:lstStyle/>
           <a:p>
-            <a:pPr indent="0" marL="0">
+            <a:pPr marL="0" indent="0">
               <a:buNone/>
             </a:pPr>
             <a:r>
@@ -4590,7 +4456,7 @@
           <a:bodyPr wrap="square" rtlCol="0" anchor="ctr"/>
           <a:lstStyle/>
           <a:p>
-            <a:pPr indent="0" marL="0">
+            <a:pPr marL="0" indent="0">
               <a:buNone/>
             </a:pPr>
             <a:r>
@@ -4629,7 +4495,7 @@
           <a:bodyPr wrap="square" rtlCol="0" anchor="ctr"/>
           <a:lstStyle/>
           <a:p>
-            <a:pPr indent="0" marL="0">
+            <a:pPr marL="0" indent="0">
               <a:buNone/>
             </a:pPr>
             <a:r>
@@ -4668,7 +4534,7 @@
           <a:bodyPr wrap="square" rtlCol="0" anchor="ctr"/>
           <a:lstStyle/>
           <a:p>
-            <a:pPr indent="0" marL="0">
+            <a:pPr marL="0" indent="0">
               <a:buNone/>
             </a:pPr>
             <a:r>
@@ -4702,6 +4568,7 @@
         <a:solidFill>
           <a:srgbClr val="FFFFFF"/>
         </a:solidFill>
+        <a:effectLst/>
       </p:bgPr>
     </p:bg>
     <p:spTree>
@@ -4739,11 +4606,11 @@
           <a:bodyPr wrap="square" rtlCol="0" anchor="ctr"/>
           <a:lstStyle/>
           <a:p>
-            <a:pPr indent="0" marL="0">
-              <a:buNone/>
-            </a:pPr>
-            <a:r>
-              <a:rPr lang="en-US" sz="1300" b="1" spc="200" kern="0" dirty="0">
+            <a:pPr marL="0" indent="0">
+              <a:buNone/>
+            </a:pPr>
+            <a:r>
+              <a:rPr lang="en-US" sz="1300" b="1" kern="0" spc="200" dirty="0">
                 <a:solidFill>
                   <a:srgbClr val="00A896"/>
                 </a:solidFill>
@@ -4778,7 +4645,7 @@
           <a:bodyPr wrap="square" rtlCol="0" anchor="ctr"/>
           <a:lstStyle/>
           <a:p>
-            <a:pPr indent="0" marL="0">
+            <a:pPr marL="0" indent="0">
               <a:buNone/>
             </a:pPr>
             <a:r>
@@ -4815,254 +4682,17 @@
           </a:solidFill>
           <a:ln/>
         </p:spPr>
+        <p:txBody>
+          <a:bodyPr/>
+          <a:lstStyle/>
+          <a:p>
+            <a:endParaRPr lang="en-US"/>
+          </a:p>
+        </p:txBody>
       </p:sp>
       <p:pic>
         <p:nvPicPr>
-          <p:cNvPr id="5" name="Image 0" descr="preencoded.png">    </p:cNvPr>
-          <p:cNvPicPr>
-            <a:picLocks noChangeAspect="1"/>
-          </p:cNvPicPr>
-          <p:nvPr/>
-        </p:nvPicPr>
-        <p:blipFill>
-          <a:blip r:embed="rId1"/>
-          <a:stretch>
-            <a:fillRect/>
-          </a:stretch>
-        </p:blipFill>
-        <p:spPr>
-          <a:xfrm>
-            <a:off x="907085" y="1775765"/>
-            <a:ext cx="380390" cy="380390"/>
-          </a:xfrm>
-          <a:prstGeom prst="rect">
-            <a:avLst/>
-          </a:prstGeom>
-        </p:spPr>
-      </p:pic>
-      <p:sp>
-        <p:nvSpPr>
-          <p:cNvPr id="6" name="Text 3"/>
-          <p:cNvSpPr/>
-          <p:nvPr/>
-        </p:nvSpPr>
-        <p:spPr>
-          <a:xfrm>
-            <a:off x="1691640" y="1581912"/>
-            <a:ext cx="2743200" cy="365760"/>
-          </a:xfrm>
-          <a:prstGeom prst="rect">
-            <a:avLst/>
-          </a:prstGeom>
-          <a:noFill/>
-          <a:ln/>
-        </p:spPr>
-        <p:txBody>
-          <a:bodyPr wrap="square" rtlCol="0" anchor="ctr"/>
-          <a:lstStyle/>
-          <a:p>
-            <a:pPr indent="0" marL="0">
-              <a:buNone/>
-            </a:pPr>
-            <a:r>
-              <a:rPr lang="en-US" sz="1800" b="1" dirty="0">
-                <a:solidFill>
-                  <a:srgbClr val="1B2B2B"/>
-                </a:solidFill>
-                <a:latin typeface="Calibri" pitchFamily="34" charset="0"/>
-                <a:ea typeface="Calibri" pitchFamily="34" charset="-122"/>
-                <a:cs typeface="Calibri" pitchFamily="34" charset="-120"/>
-              </a:rPr>
-              <a:t>SDLC</a:t>
-            </a:r>
-            <a:endParaRPr lang="en-US" sz="1800" dirty="0"/>
-          </a:p>
-        </p:txBody>
-      </p:sp>
-      <p:sp>
-        <p:nvSpPr>
-          <p:cNvPr id="7" name="Text 4"/>
-          <p:cNvSpPr/>
-          <p:nvPr/>
-        </p:nvSpPr>
-        <p:spPr>
-          <a:xfrm>
-            <a:off x="1691640" y="1920240"/>
-            <a:ext cx="8961120" cy="457200"/>
-          </a:xfrm>
-          <a:prstGeom prst="rect">
-            <a:avLst/>
-          </a:prstGeom>
-          <a:noFill/>
-          <a:ln/>
-        </p:spPr>
-        <p:txBody>
-          <a:bodyPr wrap="square" rtlCol="0" anchor="ctr"/>
-          <a:lstStyle/>
-          <a:p>
-            <a:pPr indent="0" marL="0">
-              <a:buNone/>
-            </a:pPr>
-            <a:r>
-              <a:rPr lang="en-US" sz="1400" dirty="0">
-                <a:solidFill>
-                  <a:srgbClr val="5A6B6B"/>
-                </a:solidFill>
-                <a:latin typeface="Calibri" pitchFamily="34" charset="0"/>
-                <a:ea typeface="Calibri" pitchFamily="34" charset="-122"/>
-                <a:cs typeface="Calibri" pitchFamily="34" charset="-120"/>
-              </a:rPr>
-              <a:t>The Software Development Life Cycle — the stages software goes through to get built.</a:t>
-            </a:r>
-            <a:endParaRPr lang="en-US" sz="1400" dirty="0"/>
-          </a:p>
-        </p:txBody>
-      </p:sp>
-      <p:sp>
-        <p:nvSpPr>
-          <p:cNvPr id="8" name="Shape 5"/>
-          <p:cNvSpPr/>
-          <p:nvPr/>
-        </p:nvSpPr>
-        <p:spPr>
-          <a:xfrm>
-            <a:off x="731520" y="2834640"/>
-            <a:ext cx="731520" cy="731520"/>
-          </a:xfrm>
-          <a:prstGeom prst="ellipse">
-            <a:avLst/>
-          </a:prstGeom>
-          <a:solidFill>
-            <a:srgbClr val="028090"/>
-          </a:solidFill>
-          <a:ln/>
-        </p:spPr>
-      </p:sp>
-      <p:pic>
-        <p:nvPicPr>
-          <p:cNvPr id="9" name="Image 1" descr="preencoded.png">    </p:cNvPr>
-          <p:cNvPicPr>
-            <a:picLocks noChangeAspect="1"/>
-          </p:cNvPicPr>
-          <p:nvPr/>
-        </p:nvPicPr>
-        <p:blipFill>
-          <a:blip r:embed="rId2"/>
-          <a:stretch>
-            <a:fillRect/>
-          </a:stretch>
-        </p:blipFill>
-        <p:spPr>
-          <a:xfrm>
-            <a:off x="907085" y="3010205"/>
-            <a:ext cx="380390" cy="380390"/>
-          </a:xfrm>
-          <a:prstGeom prst="rect">
-            <a:avLst/>
-          </a:prstGeom>
-        </p:spPr>
-      </p:pic>
-      <p:sp>
-        <p:nvSpPr>
-          <p:cNvPr id="10" name="Text 6"/>
-          <p:cNvSpPr/>
-          <p:nvPr/>
-        </p:nvSpPr>
-        <p:spPr>
-          <a:xfrm>
-            <a:off x="1691640" y="2816352"/>
-            <a:ext cx="2743200" cy="365760"/>
-          </a:xfrm>
-          <a:prstGeom prst="rect">
-            <a:avLst/>
-          </a:prstGeom>
-          <a:noFill/>
-          <a:ln/>
-        </p:spPr>
-        <p:txBody>
-          <a:bodyPr wrap="square" rtlCol="0" anchor="ctr"/>
-          <a:lstStyle/>
-          <a:p>
-            <a:pPr indent="0" marL="0">
-              <a:buNone/>
-            </a:pPr>
-            <a:r>
-              <a:rPr lang="en-US" sz="1800" b="1" dirty="0">
-                <a:solidFill>
-                  <a:srgbClr val="1B2B2B"/>
-                </a:solidFill>
-                <a:latin typeface="Calibri" pitchFamily="34" charset="0"/>
-                <a:ea typeface="Calibri" pitchFamily="34" charset="-122"/>
-                <a:cs typeface="Calibri" pitchFamily="34" charset="-120"/>
-              </a:rPr>
-              <a:t>STLC</a:t>
-            </a:r>
-            <a:endParaRPr lang="en-US" sz="1800" dirty="0"/>
-          </a:p>
-        </p:txBody>
-      </p:sp>
-      <p:sp>
-        <p:nvSpPr>
-          <p:cNvPr id="11" name="Text 7"/>
-          <p:cNvSpPr/>
-          <p:nvPr/>
-        </p:nvSpPr>
-        <p:spPr>
-          <a:xfrm>
-            <a:off x="1691640" y="3154680"/>
-            <a:ext cx="8961120" cy="457200"/>
-          </a:xfrm>
-          <a:prstGeom prst="rect">
-            <a:avLst/>
-          </a:prstGeom>
-          <a:noFill/>
-          <a:ln/>
-        </p:spPr>
-        <p:txBody>
-          <a:bodyPr wrap="square" rtlCol="0" anchor="ctr"/>
-          <a:lstStyle/>
-          <a:p>
-            <a:pPr indent="0" marL="0">
-              <a:buNone/>
-            </a:pPr>
-            <a:r>
-              <a:rPr lang="en-US" sz="1400" dirty="0">
-                <a:solidFill>
-                  <a:srgbClr val="5A6B6B"/>
-                </a:solidFill>
-                <a:latin typeface="Calibri" pitchFamily="34" charset="0"/>
-                <a:ea typeface="Calibri" pitchFamily="34" charset="-122"/>
-                <a:cs typeface="Calibri" pitchFamily="34" charset="-120"/>
-              </a:rPr>
-              <a:t>The Software Testing Life Cycle — the stages testing goes through, alongside development.</a:t>
-            </a:r>
-            <a:endParaRPr lang="en-US" sz="1400" dirty="0"/>
-          </a:p>
-        </p:txBody>
-      </p:sp>
-      <p:sp>
-        <p:nvSpPr>
-          <p:cNvPr id="12" name="Shape 8"/>
-          <p:cNvSpPr/>
-          <p:nvPr/>
-        </p:nvSpPr>
-        <p:spPr>
-          <a:xfrm>
-            <a:off x="731520" y="4069080"/>
-            <a:ext cx="731520" cy="731520"/>
-          </a:xfrm>
-          <a:prstGeom prst="ellipse">
-            <a:avLst/>
-          </a:prstGeom>
-          <a:solidFill>
-            <a:srgbClr val="028090"/>
-          </a:solidFill>
-          <a:ln/>
-        </p:spPr>
-      </p:sp>
-      <p:pic>
-        <p:nvPicPr>
-          <p:cNvPr id="13" name="Image 2" descr="preencoded.png">    </p:cNvPr>
+          <p:cNvPr id="5" name="Image 0" descr="preencoded.png"/>
           <p:cNvPicPr>
             <a:picLocks noChangeAspect="1"/>
           </p:cNvPicPr>
@@ -5076,6 +4706,264 @@
         </p:blipFill>
         <p:spPr>
           <a:xfrm>
+            <a:off x="907085" y="1775765"/>
+            <a:ext cx="380390" cy="380390"/>
+          </a:xfrm>
+          <a:prstGeom prst="rect">
+            <a:avLst/>
+          </a:prstGeom>
+        </p:spPr>
+      </p:pic>
+      <p:sp>
+        <p:nvSpPr>
+          <p:cNvPr id="6" name="Text 3"/>
+          <p:cNvSpPr/>
+          <p:nvPr/>
+        </p:nvSpPr>
+        <p:spPr>
+          <a:xfrm>
+            <a:off x="1691640" y="1581912"/>
+            <a:ext cx="2743200" cy="365760"/>
+          </a:xfrm>
+          <a:prstGeom prst="rect">
+            <a:avLst/>
+          </a:prstGeom>
+          <a:noFill/>
+          <a:ln/>
+        </p:spPr>
+        <p:txBody>
+          <a:bodyPr wrap="square" rtlCol="0" anchor="ctr"/>
+          <a:lstStyle/>
+          <a:p>
+            <a:pPr marL="0" indent="0">
+              <a:buNone/>
+            </a:pPr>
+            <a:r>
+              <a:rPr lang="en-US" sz="1800" b="1" dirty="0">
+                <a:solidFill>
+                  <a:srgbClr val="1B2B2B"/>
+                </a:solidFill>
+                <a:latin typeface="Calibri" pitchFamily="34" charset="0"/>
+                <a:ea typeface="Calibri" pitchFamily="34" charset="-122"/>
+                <a:cs typeface="Calibri" pitchFamily="34" charset="-120"/>
+              </a:rPr>
+              <a:t>SDLC</a:t>
+            </a:r>
+            <a:endParaRPr lang="en-US" sz="1800" dirty="0"/>
+          </a:p>
+        </p:txBody>
+      </p:sp>
+      <p:sp>
+        <p:nvSpPr>
+          <p:cNvPr id="7" name="Text 4"/>
+          <p:cNvSpPr/>
+          <p:nvPr/>
+        </p:nvSpPr>
+        <p:spPr>
+          <a:xfrm>
+            <a:off x="1691640" y="1920240"/>
+            <a:ext cx="8961120" cy="457200"/>
+          </a:xfrm>
+          <a:prstGeom prst="rect">
+            <a:avLst/>
+          </a:prstGeom>
+          <a:noFill/>
+          <a:ln/>
+        </p:spPr>
+        <p:txBody>
+          <a:bodyPr wrap="square" rtlCol="0" anchor="ctr"/>
+          <a:lstStyle/>
+          <a:p>
+            <a:pPr marL="0" indent="0">
+              <a:buNone/>
+            </a:pPr>
+            <a:r>
+              <a:rPr lang="en-US" sz="1400" dirty="0">
+                <a:solidFill>
+                  <a:srgbClr val="5A6B6B"/>
+                </a:solidFill>
+                <a:latin typeface="Calibri" pitchFamily="34" charset="0"/>
+                <a:ea typeface="Calibri" pitchFamily="34" charset="-122"/>
+                <a:cs typeface="Calibri" pitchFamily="34" charset="-120"/>
+              </a:rPr>
+              <a:t>The Software Development Life Cycle — the stages software goes through to get built.</a:t>
+            </a:r>
+            <a:endParaRPr lang="en-US" sz="1400" dirty="0"/>
+          </a:p>
+        </p:txBody>
+      </p:sp>
+      <p:sp>
+        <p:nvSpPr>
+          <p:cNvPr id="8" name="Shape 5"/>
+          <p:cNvSpPr/>
+          <p:nvPr/>
+        </p:nvSpPr>
+        <p:spPr>
+          <a:xfrm>
+            <a:off x="731520" y="2834640"/>
+            <a:ext cx="731520" cy="731520"/>
+          </a:xfrm>
+          <a:prstGeom prst="ellipse">
+            <a:avLst/>
+          </a:prstGeom>
+          <a:solidFill>
+            <a:srgbClr val="028090"/>
+          </a:solidFill>
+          <a:ln/>
+        </p:spPr>
+        <p:txBody>
+          <a:bodyPr/>
+          <a:lstStyle/>
+          <a:p>
+            <a:endParaRPr lang="en-US"/>
+          </a:p>
+        </p:txBody>
+      </p:sp>
+      <p:pic>
+        <p:nvPicPr>
+          <p:cNvPr id="9" name="Image 1" descr="preencoded.png"/>
+          <p:cNvPicPr>
+            <a:picLocks noChangeAspect="1"/>
+          </p:cNvPicPr>
+          <p:nvPr/>
+        </p:nvPicPr>
+        <p:blipFill>
+          <a:blip r:embed="rId4"/>
+          <a:stretch>
+            <a:fillRect/>
+          </a:stretch>
+        </p:blipFill>
+        <p:spPr>
+          <a:xfrm>
+            <a:off x="907085" y="3010205"/>
+            <a:ext cx="380390" cy="380390"/>
+          </a:xfrm>
+          <a:prstGeom prst="rect">
+            <a:avLst/>
+          </a:prstGeom>
+        </p:spPr>
+      </p:pic>
+      <p:sp>
+        <p:nvSpPr>
+          <p:cNvPr id="10" name="Text 6"/>
+          <p:cNvSpPr/>
+          <p:nvPr/>
+        </p:nvSpPr>
+        <p:spPr>
+          <a:xfrm>
+            <a:off x="1691640" y="2816352"/>
+            <a:ext cx="2743200" cy="365760"/>
+          </a:xfrm>
+          <a:prstGeom prst="rect">
+            <a:avLst/>
+          </a:prstGeom>
+          <a:noFill/>
+          <a:ln/>
+        </p:spPr>
+        <p:txBody>
+          <a:bodyPr wrap="square" rtlCol="0" anchor="ctr"/>
+          <a:lstStyle/>
+          <a:p>
+            <a:pPr marL="0" indent="0">
+              <a:buNone/>
+            </a:pPr>
+            <a:r>
+              <a:rPr lang="en-US" sz="1800" b="1" dirty="0">
+                <a:solidFill>
+                  <a:srgbClr val="1B2B2B"/>
+                </a:solidFill>
+                <a:latin typeface="Calibri" pitchFamily="34" charset="0"/>
+                <a:ea typeface="Calibri" pitchFamily="34" charset="-122"/>
+                <a:cs typeface="Calibri" pitchFamily="34" charset="-120"/>
+              </a:rPr>
+              <a:t>STLC</a:t>
+            </a:r>
+            <a:endParaRPr lang="en-US" sz="1800" dirty="0"/>
+          </a:p>
+        </p:txBody>
+      </p:sp>
+      <p:sp>
+        <p:nvSpPr>
+          <p:cNvPr id="11" name="Text 7"/>
+          <p:cNvSpPr/>
+          <p:nvPr/>
+        </p:nvSpPr>
+        <p:spPr>
+          <a:xfrm>
+            <a:off x="1691640" y="3154680"/>
+            <a:ext cx="8961120" cy="457200"/>
+          </a:xfrm>
+          <a:prstGeom prst="rect">
+            <a:avLst/>
+          </a:prstGeom>
+          <a:noFill/>
+          <a:ln/>
+        </p:spPr>
+        <p:txBody>
+          <a:bodyPr wrap="square" rtlCol="0" anchor="ctr"/>
+          <a:lstStyle/>
+          <a:p>
+            <a:pPr marL="0" indent="0">
+              <a:buNone/>
+            </a:pPr>
+            <a:r>
+              <a:rPr lang="en-US" sz="1400" dirty="0">
+                <a:solidFill>
+                  <a:srgbClr val="5A6B6B"/>
+                </a:solidFill>
+                <a:latin typeface="Calibri" pitchFamily="34" charset="0"/>
+                <a:ea typeface="Calibri" pitchFamily="34" charset="-122"/>
+                <a:cs typeface="Calibri" pitchFamily="34" charset="-120"/>
+              </a:rPr>
+              <a:t>The Software Testing Life Cycle — the stages testing goes through, alongside development.</a:t>
+            </a:r>
+            <a:endParaRPr lang="en-US" sz="1400" dirty="0"/>
+          </a:p>
+        </p:txBody>
+      </p:sp>
+      <p:sp>
+        <p:nvSpPr>
+          <p:cNvPr id="12" name="Shape 8"/>
+          <p:cNvSpPr/>
+          <p:nvPr/>
+        </p:nvSpPr>
+        <p:spPr>
+          <a:xfrm>
+            <a:off x="731520" y="4069080"/>
+            <a:ext cx="731520" cy="731520"/>
+          </a:xfrm>
+          <a:prstGeom prst="ellipse">
+            <a:avLst/>
+          </a:prstGeom>
+          <a:solidFill>
+            <a:srgbClr val="028090"/>
+          </a:solidFill>
+          <a:ln/>
+        </p:spPr>
+        <p:txBody>
+          <a:bodyPr/>
+          <a:lstStyle/>
+          <a:p>
+            <a:endParaRPr lang="en-US"/>
+          </a:p>
+        </p:txBody>
+      </p:sp>
+      <p:pic>
+        <p:nvPicPr>
+          <p:cNvPr id="13" name="Image 2" descr="preencoded.png"/>
+          <p:cNvPicPr>
+            <a:picLocks noChangeAspect="1"/>
+          </p:cNvPicPr>
+          <p:nvPr/>
+        </p:nvPicPr>
+        <p:blipFill>
+          <a:blip r:embed="rId5"/>
+          <a:stretch>
+            <a:fillRect/>
+          </a:stretch>
+        </p:blipFill>
+        <p:spPr>
+          <a:xfrm>
             <a:off x="907085" y="4244645"/>
             <a:ext cx="380390" cy="380390"/>
           </a:xfrm>
@@ -5105,7 +4993,7 @@
           <a:bodyPr wrap="square" rtlCol="0" anchor="ctr"/>
           <a:lstStyle/>
           <a:p>
-            <a:pPr indent="0" marL="0">
+            <a:pPr marL="0" indent="0">
               <a:buNone/>
             </a:pPr>
             <a:r>
@@ -5144,7 +5032,7 @@
           <a:bodyPr wrap="square" rtlCol="0" anchor="ctr"/>
           <a:lstStyle/>
           <a:p>
-            <a:pPr indent="0" marL="0">
+            <a:pPr marL="0" indent="0">
               <a:buNone/>
             </a:pPr>
             <a:r>
@@ -5183,6 +5071,13 @@
           </a:solidFill>
           <a:ln/>
         </p:spPr>
+        <p:txBody>
+          <a:bodyPr/>
+          <a:lstStyle/>
+          <a:p>
+            <a:endParaRPr lang="en-US"/>
+          </a:p>
+        </p:txBody>
       </p:sp>
       <p:sp>
         <p:nvSpPr>
@@ -5205,7 +5100,7 @@
           <a:bodyPr wrap="square" rtlCol="0" anchor="ctr"/>
           <a:lstStyle/>
           <a:p>
-            <a:pPr indent="0" marL="0">
+            <a:pPr marL="0" indent="0">
               <a:buNone/>
             </a:pPr>
             <a:r>
@@ -5219,9 +5114,6 @@
               </a:rPr>
               <a:t>Last time: </a:t>
             </a:r>
-            <a:pPr indent="0" marL="0">
-              <a:buNone/>
-            </a:pPr>
             <a:r>
               <a:rPr lang="en-US" sz="1400" dirty="0">
                 <a:solidFill>
@@ -5258,7 +5150,7 @@
           <a:bodyPr wrap="square" rtlCol="0" anchor="ctr"/>
           <a:lstStyle/>
           <a:p>
-            <a:pPr algn="r" indent="0" marL="0">
+            <a:pPr marL="0" indent="0" algn="r">
               <a:buNone/>
             </a:pPr>
             <a:r>
@@ -5292,6 +5184,7 @@
         <a:solidFill>
           <a:srgbClr val="FFFFFF"/>
         </a:solidFill>
+        <a:effectLst/>
       </p:bgPr>
     </p:bg>
     <p:spTree>
@@ -5329,11 +5222,11 @@
           <a:bodyPr wrap="square" rtlCol="0" anchor="ctr"/>
           <a:lstStyle/>
           <a:p>
-            <a:pPr indent="0" marL="0">
-              <a:buNone/>
-            </a:pPr>
-            <a:r>
-              <a:rPr lang="en-US" sz="1300" b="1" spc="200" kern="0" dirty="0">
+            <a:pPr marL="0" indent="0">
+              <a:buNone/>
+            </a:pPr>
+            <a:r>
+              <a:rPr lang="en-US" sz="1300" b="1" kern="0" spc="200" dirty="0">
                 <a:solidFill>
                   <a:srgbClr val="00A896"/>
                 </a:solidFill>
@@ -5368,7 +5261,7 @@
           <a:bodyPr wrap="square" rtlCol="0" anchor="ctr"/>
           <a:lstStyle/>
           <a:p>
-            <a:pPr indent="0" marL="0">
+            <a:pPr marL="0" indent="0">
               <a:buNone/>
             </a:pPr>
             <a:r>
@@ -5407,6 +5300,13 @@
           </a:solidFill>
           <a:ln/>
         </p:spPr>
+        <p:txBody>
+          <a:bodyPr/>
+          <a:lstStyle/>
+          <a:p>
+            <a:endParaRPr lang="en-US"/>
+          </a:p>
+        </p:txBody>
       </p:sp>
       <p:sp>
         <p:nvSpPr>
@@ -5429,11 +5329,11 @@
           <a:bodyPr wrap="square" rtlCol="0" anchor="ctr"/>
           <a:lstStyle/>
           <a:p>
-            <a:pPr indent="0" marL="0">
-              <a:buNone/>
-            </a:pPr>
-            <a:r>
-              <a:rPr lang="en-US" sz="1200" b="1" spc="200" kern="0" dirty="0">
+            <a:pPr marL="0" indent="0">
+              <a:buNone/>
+            </a:pPr>
+            <a:r>
+              <a:rPr lang="en-US" sz="1200" b="1" kern="0" spc="200" dirty="0">
                 <a:solidFill>
                   <a:srgbClr val="028090"/>
                 </a:solidFill>
@@ -5468,7 +5368,7 @@
           <a:bodyPr wrap="square" rtlCol="0" anchor="ctr"/>
           <a:lstStyle/>
           <a:p>
-            <a:pPr indent="0" marL="0">
+            <a:pPr marL="0" indent="0">
               <a:buNone/>
             </a:pPr>
             <a:r>
@@ -5507,7 +5407,7 @@
           <a:bodyPr wrap="square" rtlCol="0" anchor="ctr"/>
           <a:lstStyle/>
           <a:p>
-            <a:pPr indent="0" marL="0">
+            <a:pPr marL="0" indent="0">
               <a:buNone/>
             </a:pPr>
             <a:r>
@@ -5546,6 +5446,13 @@
           </a:solidFill>
           <a:ln/>
         </p:spPr>
+        <p:txBody>
+          <a:bodyPr/>
+          <a:lstStyle/>
+          <a:p>
+            <a:endParaRPr lang="en-US"/>
+          </a:p>
+        </p:txBody>
       </p:sp>
       <p:sp>
         <p:nvSpPr>
@@ -5568,11 +5475,11 @@
           <a:bodyPr wrap="square" rtlCol="0" anchor="ctr"/>
           <a:lstStyle/>
           <a:p>
-            <a:pPr indent="0" marL="0">
-              <a:buNone/>
-            </a:pPr>
-            <a:r>
-              <a:rPr lang="en-US" sz="1200" b="1" spc="200" kern="0" dirty="0">
+            <a:pPr marL="0" indent="0">
+              <a:buNone/>
+            </a:pPr>
+            <a:r>
+              <a:rPr lang="en-US" sz="1200" b="1" kern="0" spc="200" dirty="0">
                 <a:solidFill>
                   <a:srgbClr val="CADCFC"/>
                 </a:solidFill>
@@ -5607,7 +5514,7 @@
           <a:bodyPr wrap="square" rtlCol="0" anchor="ctr"/>
           <a:lstStyle/>
           <a:p>
-            <a:pPr indent="0" marL="0">
+            <a:pPr marL="0" indent="0">
               <a:buNone/>
             </a:pPr>
             <a:r>
@@ -5646,7 +5553,7 @@
           <a:bodyPr wrap="square" rtlCol="0" anchor="ctr"/>
           <a:lstStyle/>
           <a:p>
-            <a:pPr indent="0" marL="0">
+            <a:pPr marL="0" indent="0">
               <a:buNone/>
             </a:pPr>
             <a:r>
@@ -5685,6 +5592,13 @@
           </a:solidFill>
           <a:ln/>
         </p:spPr>
+        <p:txBody>
+          <a:bodyPr/>
+          <a:lstStyle/>
+          <a:p>
+            <a:endParaRPr lang="en-US"/>
+          </a:p>
+        </p:txBody>
       </p:sp>
       <p:sp>
         <p:nvSpPr>
@@ -5707,11 +5621,11 @@
           <a:bodyPr wrap="square" rtlCol="0" anchor="ctr"/>
           <a:lstStyle/>
           <a:p>
-            <a:pPr indent="0" marL="0">
-              <a:buNone/>
-            </a:pPr>
-            <a:r>
-              <a:rPr lang="en-US" sz="1200" b="1" spc="200" kern="0" dirty="0">
+            <a:pPr marL="0" indent="0">
+              <a:buNone/>
+            </a:pPr>
+            <a:r>
+              <a:rPr lang="en-US" sz="1200" b="1" kern="0" spc="200" dirty="0">
                 <a:solidFill>
                   <a:srgbClr val="028090"/>
                 </a:solidFill>
@@ -5746,7 +5660,7 @@
           <a:bodyPr wrap="square" rtlCol="0" anchor="ctr"/>
           <a:lstStyle/>
           <a:p>
-            <a:pPr indent="0" marL="0">
+            <a:pPr marL="0" indent="0">
               <a:buNone/>
             </a:pPr>
             <a:r>
@@ -5785,7 +5699,7 @@
           <a:bodyPr wrap="square" rtlCol="0" anchor="ctr"/>
           <a:lstStyle/>
           <a:p>
-            <a:pPr indent="0" marL="0">
+            <a:pPr marL="0" indent="0">
               <a:buNone/>
             </a:pPr>
             <a:r>
@@ -5824,7 +5738,7 @@
           <a:bodyPr wrap="square" rtlCol="0" anchor="ctr"/>
           <a:lstStyle/>
           <a:p>
-            <a:pPr algn="r" indent="0" marL="0">
+            <a:pPr marL="0" indent="0" algn="r">
               <a:buNone/>
             </a:pPr>
             <a:r>
@@ -5858,6 +5772,7 @@
         <a:solidFill>
           <a:srgbClr val="FFFFFF"/>
         </a:solidFill>
+        <a:effectLst/>
       </p:bgPr>
     </p:bg>
     <p:spTree>
@@ -5895,11 +5810,11 @@
           <a:bodyPr wrap="square" rtlCol="0" anchor="ctr"/>
           <a:lstStyle/>
           <a:p>
-            <a:pPr indent="0" marL="0">
-              <a:buNone/>
-            </a:pPr>
-            <a:r>
-              <a:rPr lang="en-US" sz="1300" b="1" spc="200" kern="0" dirty="0">
+            <a:pPr marL="0" indent="0">
+              <a:buNone/>
+            </a:pPr>
+            <a:r>
+              <a:rPr lang="en-US" sz="1300" b="1" kern="0" spc="200" dirty="0">
                 <a:solidFill>
                   <a:srgbClr val="00A896"/>
                 </a:solidFill>
@@ -5932,17 +5847,24 @@
           </a:solidFill>
           <a:ln/>
         </p:spPr>
+        <p:txBody>
+          <a:bodyPr/>
+          <a:lstStyle/>
+          <a:p>
+            <a:endParaRPr lang="en-US"/>
+          </a:p>
+        </p:txBody>
       </p:sp>
       <p:pic>
         <p:nvPicPr>
-          <p:cNvPr id="4" name="Image 0" descr="preencoded.png">    </p:cNvPr>
+          <p:cNvPr id="4" name="Image 0" descr="preencoded.png"/>
           <p:cNvPicPr>
             <a:picLocks noChangeAspect="1"/>
           </p:cNvPicPr>
           <p:nvPr/>
         </p:nvPicPr>
         <p:blipFill>
-          <a:blip r:embed="rId1"/>
+          <a:blip r:embed="rId3"/>
           <a:stretch>
             <a:fillRect/>
           </a:stretch>
@@ -5978,7 +5900,7 @@
           <a:bodyPr wrap="square" rtlCol="0" anchor="ctr"/>
           <a:lstStyle/>
           <a:p>
-            <a:pPr indent="0" marL="0">
+            <a:pPr marL="0" indent="0">
               <a:buNone/>
             </a:pPr>
             <a:r>
@@ -6017,7 +5939,7 @@
           <a:bodyPr wrap="square" rtlCol="0" anchor="ctr"/>
           <a:lstStyle/>
           <a:p>
-            <a:pPr indent="0" marL="0">
+            <a:pPr marL="0" indent="0">
               <a:buNone/>
             </a:pPr>
             <a:r>
@@ -6056,7 +5978,7 @@
           <a:bodyPr wrap="square" rtlCol="0" anchor="ctr"/>
           <a:lstStyle/>
           <a:p>
-            <a:pPr indent="0" marL="0">
+            <a:pPr marL="0" indent="0">
               <a:buNone/>
             </a:pPr>
             <a:r>
@@ -6095,6 +6017,13 @@
           </a:solidFill>
           <a:ln/>
         </p:spPr>
+        <p:txBody>
+          <a:bodyPr/>
+          <a:lstStyle/>
+          <a:p>
+            <a:endParaRPr lang="en-US"/>
+          </a:p>
+        </p:txBody>
       </p:sp>
       <p:sp>
         <p:nvSpPr>
@@ -6117,11 +6046,11 @@
           <a:bodyPr wrap="square" rtlCol="0" anchor="ctr"/>
           <a:lstStyle/>
           <a:p>
-            <a:pPr indent="0" marL="0">
-              <a:buNone/>
-            </a:pPr>
-            <a:r>
-              <a:rPr lang="en-US" sz="1200" b="1" spc="200" kern="0" dirty="0">
+            <a:pPr marL="0" indent="0">
+              <a:buNone/>
+            </a:pPr>
+            <a:r>
+              <a:rPr lang="en-US" sz="1200" b="1" kern="0" spc="200" dirty="0">
                 <a:solidFill>
                   <a:srgbClr val="028090"/>
                 </a:solidFill>
@@ -6156,7 +6085,7 @@
           <a:bodyPr wrap="square" rtlCol="0" anchor="ctr"/>
           <a:lstStyle/>
           <a:p>
-            <a:pPr indent="0" marL="0">
+            <a:pPr marL="0" indent="0">
               <a:buNone/>
             </a:pPr>
             <a:r>
@@ -6195,7 +6124,7 @@
           <a:bodyPr wrap="square" rtlCol="0" anchor="ctr"/>
           <a:lstStyle/>
           <a:p>
-            <a:pPr indent="0" marL="0">
+            <a:pPr marL="0" indent="0">
               <a:buNone/>
             </a:pPr>
             <a:r>
@@ -6234,7 +6163,7 @@
           <a:bodyPr wrap="square" rtlCol="0" anchor="ctr"/>
           <a:lstStyle/>
           <a:p>
-            <a:pPr algn="r" indent="0" marL="0">
+            <a:pPr marL="0" indent="0" algn="r">
               <a:buNone/>
             </a:pPr>
             <a:r>
@@ -6268,6 +6197,7 @@
         <a:solidFill>
           <a:srgbClr val="FFFFFF"/>
         </a:solidFill>
+        <a:effectLst/>
       </p:bgPr>
     </p:bg>
     <p:spTree>
@@ -6305,11 +6235,11 @@
           <a:bodyPr wrap="square" rtlCol="0" anchor="ctr"/>
           <a:lstStyle/>
           <a:p>
-            <a:pPr indent="0" marL="0">
-              <a:buNone/>
-            </a:pPr>
-            <a:r>
-              <a:rPr lang="en-US" sz="1300" b="1" spc="200" kern="0" dirty="0">
+            <a:pPr marL="0" indent="0">
+              <a:buNone/>
+            </a:pPr>
+            <a:r>
+              <a:rPr lang="en-US" sz="1300" b="1" kern="0" spc="200" dirty="0">
                 <a:solidFill>
                   <a:srgbClr val="00A896"/>
                 </a:solidFill>
@@ -6342,298 +6272,17 @@
           </a:solidFill>
           <a:ln/>
         </p:spPr>
+        <p:txBody>
+          <a:bodyPr/>
+          <a:lstStyle/>
+          <a:p>
+            <a:endParaRPr lang="en-US"/>
+          </a:p>
+        </p:txBody>
       </p:sp>
       <p:pic>
         <p:nvPicPr>
-          <p:cNvPr id="4" name="Image 0" descr="preencoded.png">    </p:cNvPr>
-          <p:cNvPicPr>
-            <a:picLocks noChangeAspect="1"/>
-          </p:cNvPicPr>
-          <p:nvPr/>
-        </p:nvPicPr>
-        <p:blipFill>
-          <a:blip r:embed="rId1"/>
-          <a:stretch>
-            <a:fillRect/>
-          </a:stretch>
-        </p:blipFill>
-        <p:spPr>
-          <a:xfrm>
-            <a:off x="859536" y="1088136"/>
-            <a:ext cx="475488" cy="475488"/>
-          </a:xfrm>
-          <a:prstGeom prst="rect">
-            <a:avLst/>
-          </a:prstGeom>
-        </p:spPr>
-      </p:pic>
-      <p:sp>
-        <p:nvSpPr>
-          <p:cNvPr id="5" name="Text 2"/>
-          <p:cNvSpPr/>
-          <p:nvPr/>
-        </p:nvSpPr>
-        <p:spPr>
-          <a:xfrm>
-            <a:off x="1737360" y="960120"/>
-            <a:ext cx="8686800" cy="640080"/>
-          </a:xfrm>
-          <a:prstGeom prst="rect">
-            <a:avLst/>
-          </a:prstGeom>
-          <a:noFill/>
-          <a:ln/>
-        </p:spPr>
-        <p:txBody>
-          <a:bodyPr wrap="square" rtlCol="0" anchor="ctr"/>
-          <a:lstStyle/>
-          <a:p>
-            <a:pPr indent="0" marL="0">
-              <a:buNone/>
-            </a:pPr>
-            <a:r>
-              <a:rPr lang="en-US" sz="3000" b="1" dirty="0">
-                <a:solidFill>
-                  <a:srgbClr val="1B2B2B"/>
-                </a:solidFill>
-                <a:latin typeface="Cambria" pitchFamily="34" charset="0"/>
-                <a:ea typeface="Cambria" pitchFamily="34" charset="-122"/>
-                <a:cs typeface="Cambria" pitchFamily="34" charset="-120"/>
-              </a:rPr>
-              <a:t>Non-Functional Testing</a:t>
-            </a:r>
-            <a:endParaRPr lang="en-US" sz="3000" dirty="0"/>
-          </a:p>
-        </p:txBody>
-      </p:sp>
-      <p:sp>
-        <p:nvSpPr>
-          <p:cNvPr id="6" name="Text 3"/>
-          <p:cNvSpPr/>
-          <p:nvPr/>
-        </p:nvSpPr>
-        <p:spPr>
-          <a:xfrm>
-            <a:off x="1737360" y="1463040"/>
-            <a:ext cx="8686800" cy="365760"/>
-          </a:xfrm>
-          <a:prstGeom prst="rect">
-            <a:avLst/>
-          </a:prstGeom>
-          <a:noFill/>
-          <a:ln/>
-        </p:spPr>
-        <p:txBody>
-          <a:bodyPr wrap="square" rtlCol="0" anchor="ctr"/>
-          <a:lstStyle/>
-          <a:p>
-            <a:pPr indent="0" marL="0">
-              <a:buNone/>
-            </a:pPr>
-            <a:r>
-              <a:rPr lang="en-US" sz="1500" i="1" dirty="0">
-                <a:solidFill>
-                  <a:srgbClr val="5A6B6B"/>
-                </a:solidFill>
-                <a:latin typeface="Calibri" pitchFamily="34" charset="0"/>
-                <a:ea typeface="Calibri" pitchFamily="34" charset="-122"/>
-                <a:cs typeface="Calibri" pitchFamily="34" charset="-120"/>
-              </a:rPr>
-              <a:t>Not "does it work" — but "how well does it work?"</a:t>
-            </a:r>
-            <a:endParaRPr lang="en-US" sz="1500" dirty="0"/>
-          </a:p>
-        </p:txBody>
-      </p:sp>
-      <p:sp>
-        <p:nvSpPr>
-          <p:cNvPr id="7" name="Shape 4"/>
-          <p:cNvSpPr/>
-          <p:nvPr/>
-        </p:nvSpPr>
-        <p:spPr>
-          <a:xfrm>
-            <a:off x="640080" y="2331720"/>
-            <a:ext cx="3429000" cy="3291840"/>
-          </a:xfrm>
-          <a:prstGeom prst="roundRect">
-            <a:avLst>
-              <a:gd name="adj" fmla="val 3333"/>
-            </a:avLst>
-          </a:prstGeom>
-          <a:solidFill>
-            <a:srgbClr val="F2F7F7"/>
-          </a:solidFill>
-          <a:ln/>
-        </p:spPr>
-      </p:sp>
-      <p:sp>
-        <p:nvSpPr>
-          <p:cNvPr id="8" name="Shape 5"/>
-          <p:cNvSpPr/>
-          <p:nvPr/>
-        </p:nvSpPr>
-        <p:spPr>
-          <a:xfrm>
-            <a:off x="1988820" y="2606040"/>
-            <a:ext cx="731520" cy="731520"/>
-          </a:xfrm>
-          <a:prstGeom prst="ellipse">
-            <a:avLst/>
-          </a:prstGeom>
-          <a:solidFill>
-            <a:srgbClr val="00A896"/>
-          </a:solidFill>
-          <a:ln/>
-        </p:spPr>
-      </p:sp>
-      <p:pic>
-        <p:nvPicPr>
-          <p:cNvPr id="9" name="Image 1" descr="preencoded.png">    </p:cNvPr>
-          <p:cNvPicPr>
-            <a:picLocks noChangeAspect="1"/>
-          </p:cNvPicPr>
-          <p:nvPr/>
-        </p:nvPicPr>
-        <p:blipFill>
-          <a:blip r:embed="rId2"/>
-          <a:stretch>
-            <a:fillRect/>
-          </a:stretch>
-        </p:blipFill>
-        <p:spPr>
-          <a:xfrm>
-            <a:off x="2164385" y="2781605"/>
-            <a:ext cx="380390" cy="380390"/>
-          </a:xfrm>
-          <a:prstGeom prst="rect">
-            <a:avLst/>
-          </a:prstGeom>
-        </p:spPr>
-      </p:pic>
-      <p:sp>
-        <p:nvSpPr>
-          <p:cNvPr id="10" name="Text 6"/>
-          <p:cNvSpPr/>
-          <p:nvPr/>
-        </p:nvSpPr>
-        <p:spPr>
-          <a:xfrm>
-            <a:off x="822960" y="3474720"/>
-            <a:ext cx="3063240" cy="365760"/>
-          </a:xfrm>
-          <a:prstGeom prst="rect">
-            <a:avLst/>
-          </a:prstGeom>
-          <a:noFill/>
-          <a:ln/>
-        </p:spPr>
-        <p:txBody>
-          <a:bodyPr wrap="square" rtlCol="0" anchor="ctr"/>
-          <a:lstStyle/>
-          <a:p>
-            <a:pPr algn="ctr" indent="0" marL="0">
-              <a:buNone/>
-            </a:pPr>
-            <a:r>
-              <a:rPr lang="en-US" sz="1700" b="1" dirty="0">
-                <a:solidFill>
-                  <a:srgbClr val="1B2B2B"/>
-                </a:solidFill>
-                <a:latin typeface="Calibri" pitchFamily="34" charset="0"/>
-                <a:ea typeface="Calibri" pitchFamily="34" charset="-122"/>
-                <a:cs typeface="Calibri" pitchFamily="34" charset="-120"/>
-              </a:rPr>
-              <a:t>Speed</a:t>
-            </a:r>
-            <a:endParaRPr lang="en-US" sz="1700" dirty="0"/>
-          </a:p>
-        </p:txBody>
-      </p:sp>
-      <p:sp>
-        <p:nvSpPr>
-          <p:cNvPr id="11" name="Text 7"/>
-          <p:cNvSpPr/>
-          <p:nvPr/>
-        </p:nvSpPr>
-        <p:spPr>
-          <a:xfrm>
-            <a:off x="868680" y="3886200"/>
-            <a:ext cx="2971800" cy="1554480"/>
-          </a:xfrm>
-          <a:prstGeom prst="rect">
-            <a:avLst/>
-          </a:prstGeom>
-          <a:noFill/>
-          <a:ln/>
-        </p:spPr>
-        <p:txBody>
-          <a:bodyPr wrap="square" rtlCol="0" anchor="ctr"/>
-          <a:lstStyle/>
-          <a:p>
-            <a:pPr algn="ctr" indent="0" marL="0">
-              <a:buNone/>
-            </a:pPr>
-            <a:r>
-              <a:rPr lang="en-US" sz="1300" dirty="0">
-                <a:solidFill>
-                  <a:srgbClr val="5A6B6B"/>
-                </a:solidFill>
-                <a:latin typeface="Calibri" pitchFamily="34" charset="0"/>
-                <a:ea typeface="Calibri" pitchFamily="34" charset="-122"/>
-                <a:cs typeface="Calibri" pitchFamily="34" charset="-120"/>
-              </a:rPr>
-              <a:t>The Takealot app takes 15 seconds to add an item to cart on average data.</a:t>
-            </a:r>
-            <a:endParaRPr lang="en-US" sz="1300" dirty="0"/>
-          </a:p>
-        </p:txBody>
-      </p:sp>
-      <p:sp>
-        <p:nvSpPr>
-          <p:cNvPr id="12" name="Shape 8"/>
-          <p:cNvSpPr/>
-          <p:nvPr/>
-        </p:nvSpPr>
-        <p:spPr>
-          <a:xfrm>
-            <a:off x="4389120" y="2331720"/>
-            <a:ext cx="3429000" cy="3291840"/>
-          </a:xfrm>
-          <a:prstGeom prst="roundRect">
-            <a:avLst>
-              <a:gd name="adj" fmla="val 3333"/>
-            </a:avLst>
-          </a:prstGeom>
-          <a:solidFill>
-            <a:srgbClr val="F2F7F7"/>
-          </a:solidFill>
-          <a:ln/>
-        </p:spPr>
-      </p:sp>
-      <p:sp>
-        <p:nvSpPr>
-          <p:cNvPr id="13" name="Shape 9"/>
-          <p:cNvSpPr/>
-          <p:nvPr/>
-        </p:nvSpPr>
-        <p:spPr>
-          <a:xfrm>
-            <a:off x="5737860" y="2606040"/>
-            <a:ext cx="731520" cy="731520"/>
-          </a:xfrm>
-          <a:prstGeom prst="ellipse">
-            <a:avLst/>
-          </a:prstGeom>
-          <a:solidFill>
-            <a:srgbClr val="00A896"/>
-          </a:solidFill>
-          <a:ln/>
-        </p:spPr>
-      </p:sp>
-      <p:pic>
-        <p:nvPicPr>
-          <p:cNvPr id="14" name="Image 2" descr="preencoded.png">    </p:cNvPr>
+          <p:cNvPr id="4" name="Image 0" descr="preencoded.png"/>
           <p:cNvPicPr>
             <a:picLocks noChangeAspect="1"/>
           </p:cNvPicPr>
@@ -6647,8 +6296,8 @@
         </p:blipFill>
         <p:spPr>
           <a:xfrm>
-            <a:off x="5913425" y="2781605"/>
-            <a:ext cx="380390" cy="380390"/>
+            <a:off x="859536" y="1088136"/>
+            <a:ext cx="475488" cy="475488"/>
           </a:xfrm>
           <a:prstGeom prst="rect">
             <a:avLst/>
@@ -6657,69 +6306,69 @@
       </p:pic>
       <p:sp>
         <p:nvSpPr>
-          <p:cNvPr id="15" name="Text 10"/>
-          <p:cNvSpPr/>
-          <p:nvPr/>
-        </p:nvSpPr>
-        <p:spPr>
-          <a:xfrm>
-            <a:off x="4572000" y="3474720"/>
-            <a:ext cx="3063240" cy="365760"/>
-          </a:xfrm>
-          <a:prstGeom prst="rect">
-            <a:avLst/>
-          </a:prstGeom>
-          <a:noFill/>
-          <a:ln/>
-        </p:spPr>
-        <p:txBody>
-          <a:bodyPr wrap="square" rtlCol="0" anchor="ctr"/>
-          <a:lstStyle/>
-          <a:p>
-            <a:pPr algn="ctr" indent="0" marL="0">
-              <a:buNone/>
-            </a:pPr>
-            <a:r>
-              <a:rPr lang="en-US" sz="1700" b="1" dirty="0">
+          <p:cNvPr id="5" name="Text 2"/>
+          <p:cNvSpPr/>
+          <p:nvPr/>
+        </p:nvSpPr>
+        <p:spPr>
+          <a:xfrm>
+            <a:off x="1737360" y="960120"/>
+            <a:ext cx="8686800" cy="640080"/>
+          </a:xfrm>
+          <a:prstGeom prst="rect">
+            <a:avLst/>
+          </a:prstGeom>
+          <a:noFill/>
+          <a:ln/>
+        </p:spPr>
+        <p:txBody>
+          <a:bodyPr wrap="square" rtlCol="0" anchor="ctr"/>
+          <a:lstStyle/>
+          <a:p>
+            <a:pPr marL="0" indent="0">
+              <a:buNone/>
+            </a:pPr>
+            <a:r>
+              <a:rPr lang="en-US" sz="3000" b="1" dirty="0">
                 <a:solidFill>
                   <a:srgbClr val="1B2B2B"/>
                 </a:solidFill>
-                <a:latin typeface="Calibri" pitchFamily="34" charset="0"/>
-                <a:ea typeface="Calibri" pitchFamily="34" charset="-122"/>
-                <a:cs typeface="Calibri" pitchFamily="34" charset="-120"/>
-              </a:rPr>
-              <a:t>Usability</a:t>
-            </a:r>
-            <a:endParaRPr lang="en-US" sz="1700" dirty="0"/>
-          </a:p>
-        </p:txBody>
-      </p:sp>
-      <p:sp>
-        <p:nvSpPr>
-          <p:cNvPr id="16" name="Text 11"/>
-          <p:cNvSpPr/>
-          <p:nvPr/>
-        </p:nvSpPr>
-        <p:spPr>
-          <a:xfrm>
-            <a:off x="4617720" y="3886200"/>
-            <a:ext cx="2971800" cy="1554480"/>
-          </a:xfrm>
-          <a:prstGeom prst="rect">
-            <a:avLst/>
-          </a:prstGeom>
-          <a:noFill/>
-          <a:ln/>
-        </p:spPr>
-        <p:txBody>
-          <a:bodyPr wrap="square" rtlCol="0" anchor="ctr"/>
-          <a:lstStyle/>
-          <a:p>
-            <a:pPr algn="ctr" indent="0" marL="0">
-              <a:buNone/>
-            </a:pPr>
-            <a:r>
-              <a:rPr lang="en-US" sz="1300" dirty="0">
+                <a:latin typeface="Cambria" pitchFamily="34" charset="0"/>
+                <a:ea typeface="Cambria" pitchFamily="34" charset="-122"/>
+                <a:cs typeface="Cambria" pitchFamily="34" charset="-120"/>
+              </a:rPr>
+              <a:t>Non-Functional Testing</a:t>
+            </a:r>
+            <a:endParaRPr lang="en-US" sz="3000" dirty="0"/>
+          </a:p>
+        </p:txBody>
+      </p:sp>
+      <p:sp>
+        <p:nvSpPr>
+          <p:cNvPr id="6" name="Text 3"/>
+          <p:cNvSpPr/>
+          <p:nvPr/>
+        </p:nvSpPr>
+        <p:spPr>
+          <a:xfrm>
+            <a:off x="1737360" y="1463040"/>
+            <a:ext cx="8686800" cy="365760"/>
+          </a:xfrm>
+          <a:prstGeom prst="rect">
+            <a:avLst/>
+          </a:prstGeom>
+          <a:noFill/>
+          <a:ln/>
+        </p:spPr>
+        <p:txBody>
+          <a:bodyPr wrap="square" rtlCol="0" anchor="ctr"/>
+          <a:lstStyle/>
+          <a:p>
+            <a:pPr marL="0" indent="0">
+              <a:buNone/>
+            </a:pPr>
+            <a:r>
+              <a:rPr lang="en-US" sz="1500" i="1" dirty="0">
                 <a:solidFill>
                   <a:srgbClr val="5A6B6B"/>
                 </a:solidFill>
@@ -6727,21 +6376,21 @@
                 <a:ea typeface="Calibri" pitchFamily="34" charset="-122"/>
                 <a:cs typeface="Calibri" pitchFamily="34" charset="-120"/>
               </a:rPr>
-              <a:t>An app's text is so small or low-contrast that you genuinely can't read it.</a:t>
-            </a:r>
-            <a:endParaRPr lang="en-US" sz="1300" dirty="0"/>
-          </a:p>
-        </p:txBody>
-      </p:sp>
-      <p:sp>
-        <p:nvSpPr>
-          <p:cNvPr id="17" name="Shape 12"/>
-          <p:cNvSpPr/>
-          <p:nvPr/>
-        </p:nvSpPr>
-        <p:spPr>
-          <a:xfrm>
-            <a:off x="8138160" y="2331720"/>
+              <a:t>Not "does it work" — but "how well does it work?"</a:t>
+            </a:r>
+            <a:endParaRPr lang="en-US" sz="1500" dirty="0"/>
+          </a:p>
+        </p:txBody>
+      </p:sp>
+      <p:sp>
+        <p:nvSpPr>
+          <p:cNvPr id="7" name="Shape 4"/>
+          <p:cNvSpPr/>
+          <p:nvPr/>
+        </p:nvSpPr>
+        <p:spPr>
+          <a:xfrm>
+            <a:off x="640080" y="2331720"/>
             <a:ext cx="3429000" cy="3291840"/>
           </a:xfrm>
           <a:prstGeom prst="roundRect">
@@ -6754,16 +6403,23 @@
           </a:solidFill>
           <a:ln/>
         </p:spPr>
-      </p:sp>
-      <p:sp>
-        <p:nvSpPr>
-          <p:cNvPr id="18" name="Shape 13"/>
-          <p:cNvSpPr/>
-          <p:nvPr/>
-        </p:nvSpPr>
-        <p:spPr>
-          <a:xfrm>
-            <a:off x="9486900" y="2606040"/>
+        <p:txBody>
+          <a:bodyPr/>
+          <a:lstStyle/>
+          <a:p>
+            <a:endParaRPr lang="en-US"/>
+          </a:p>
+        </p:txBody>
+      </p:sp>
+      <p:sp>
+        <p:nvSpPr>
+          <p:cNvPr id="8" name="Shape 5"/>
+          <p:cNvSpPr/>
+          <p:nvPr/>
+        </p:nvSpPr>
+        <p:spPr>
+          <a:xfrm>
+            <a:off x="1988820" y="2606040"/>
             <a:ext cx="731520" cy="731520"/>
           </a:xfrm>
           <a:prstGeom prst="ellipse">
@@ -6774,10 +6430,175 @@
           </a:solidFill>
           <a:ln/>
         </p:spPr>
+        <p:txBody>
+          <a:bodyPr/>
+          <a:lstStyle/>
+          <a:p>
+            <a:endParaRPr lang="en-US"/>
+          </a:p>
+        </p:txBody>
       </p:sp>
       <p:pic>
         <p:nvPicPr>
-          <p:cNvPr id="19" name="Image 3" descr="preencoded.png">    </p:cNvPr>
+          <p:cNvPr id="9" name="Image 1" descr="preencoded.png"/>
+          <p:cNvPicPr>
+            <a:picLocks noChangeAspect="1"/>
+          </p:cNvPicPr>
+          <p:nvPr/>
+        </p:nvPicPr>
+        <p:blipFill>
+          <a:blip r:embed="rId3"/>
+          <a:stretch>
+            <a:fillRect/>
+          </a:stretch>
+        </p:blipFill>
+        <p:spPr>
+          <a:xfrm>
+            <a:off x="2164385" y="2781605"/>
+            <a:ext cx="380390" cy="380390"/>
+          </a:xfrm>
+          <a:prstGeom prst="rect">
+            <a:avLst/>
+          </a:prstGeom>
+        </p:spPr>
+      </p:pic>
+      <p:sp>
+        <p:nvSpPr>
+          <p:cNvPr id="10" name="Text 6"/>
+          <p:cNvSpPr/>
+          <p:nvPr/>
+        </p:nvSpPr>
+        <p:spPr>
+          <a:xfrm>
+            <a:off x="822960" y="3474720"/>
+            <a:ext cx="3063240" cy="365760"/>
+          </a:xfrm>
+          <a:prstGeom prst="rect">
+            <a:avLst/>
+          </a:prstGeom>
+          <a:noFill/>
+          <a:ln/>
+        </p:spPr>
+        <p:txBody>
+          <a:bodyPr wrap="square" rtlCol="0" anchor="ctr"/>
+          <a:lstStyle/>
+          <a:p>
+            <a:pPr marL="0" indent="0" algn="ctr">
+              <a:buNone/>
+            </a:pPr>
+            <a:r>
+              <a:rPr lang="en-US" sz="1700" b="1" dirty="0">
+                <a:solidFill>
+                  <a:srgbClr val="1B2B2B"/>
+                </a:solidFill>
+                <a:latin typeface="Calibri" pitchFamily="34" charset="0"/>
+                <a:ea typeface="Calibri" pitchFamily="34" charset="-122"/>
+                <a:cs typeface="Calibri" pitchFamily="34" charset="-120"/>
+              </a:rPr>
+              <a:t>Speed</a:t>
+            </a:r>
+            <a:endParaRPr lang="en-US" sz="1700" dirty="0"/>
+          </a:p>
+        </p:txBody>
+      </p:sp>
+      <p:sp>
+        <p:nvSpPr>
+          <p:cNvPr id="11" name="Text 7"/>
+          <p:cNvSpPr/>
+          <p:nvPr/>
+        </p:nvSpPr>
+        <p:spPr>
+          <a:xfrm>
+            <a:off x="868680" y="3886200"/>
+            <a:ext cx="2971800" cy="1554480"/>
+          </a:xfrm>
+          <a:prstGeom prst="rect">
+            <a:avLst/>
+          </a:prstGeom>
+          <a:noFill/>
+          <a:ln/>
+        </p:spPr>
+        <p:txBody>
+          <a:bodyPr wrap="square" rtlCol="0" anchor="ctr"/>
+          <a:lstStyle/>
+          <a:p>
+            <a:pPr marL="0" indent="0" algn="ctr">
+              <a:buNone/>
+            </a:pPr>
+            <a:r>
+              <a:rPr lang="en-US" sz="1300" dirty="0">
+                <a:solidFill>
+                  <a:srgbClr val="5A6B6B"/>
+                </a:solidFill>
+                <a:latin typeface="Calibri" pitchFamily="34" charset="0"/>
+                <a:ea typeface="Calibri" pitchFamily="34" charset="-122"/>
+                <a:cs typeface="Calibri" pitchFamily="34" charset="-120"/>
+              </a:rPr>
+              <a:t>The Takealot app takes 15 seconds to add an item to cart on average data.</a:t>
+            </a:r>
+            <a:endParaRPr lang="en-US" sz="1300" dirty="0"/>
+          </a:p>
+        </p:txBody>
+      </p:sp>
+      <p:sp>
+        <p:nvSpPr>
+          <p:cNvPr id="12" name="Shape 8"/>
+          <p:cNvSpPr/>
+          <p:nvPr/>
+        </p:nvSpPr>
+        <p:spPr>
+          <a:xfrm>
+            <a:off x="4389120" y="2331720"/>
+            <a:ext cx="3429000" cy="3291840"/>
+          </a:xfrm>
+          <a:prstGeom prst="roundRect">
+            <a:avLst>
+              <a:gd name="adj" fmla="val 3333"/>
+            </a:avLst>
+          </a:prstGeom>
+          <a:solidFill>
+            <a:srgbClr val="F2F7F7"/>
+          </a:solidFill>
+          <a:ln/>
+        </p:spPr>
+        <p:txBody>
+          <a:bodyPr/>
+          <a:lstStyle/>
+          <a:p>
+            <a:endParaRPr lang="en-US"/>
+          </a:p>
+        </p:txBody>
+      </p:sp>
+      <p:sp>
+        <p:nvSpPr>
+          <p:cNvPr id="13" name="Shape 9"/>
+          <p:cNvSpPr/>
+          <p:nvPr/>
+        </p:nvSpPr>
+        <p:spPr>
+          <a:xfrm>
+            <a:off x="5737860" y="2606040"/>
+            <a:ext cx="731520" cy="731520"/>
+          </a:xfrm>
+          <a:prstGeom prst="ellipse">
+            <a:avLst/>
+          </a:prstGeom>
+          <a:solidFill>
+            <a:srgbClr val="00A896"/>
+          </a:solidFill>
+          <a:ln/>
+        </p:spPr>
+        <p:txBody>
+          <a:bodyPr/>
+          <a:lstStyle/>
+          <a:p>
+            <a:endParaRPr lang="en-US"/>
+          </a:p>
+        </p:txBody>
+      </p:sp>
+      <p:pic>
+        <p:nvPicPr>
+          <p:cNvPr id="14" name="Image 2" descr="preencoded.png"/>
           <p:cNvPicPr>
             <a:picLocks noChangeAspect="1"/>
           </p:cNvPicPr>
@@ -6791,6 +6612,164 @@
         </p:blipFill>
         <p:spPr>
           <a:xfrm>
+            <a:off x="5913425" y="2781605"/>
+            <a:ext cx="380390" cy="380390"/>
+          </a:xfrm>
+          <a:prstGeom prst="rect">
+            <a:avLst/>
+          </a:prstGeom>
+        </p:spPr>
+      </p:pic>
+      <p:sp>
+        <p:nvSpPr>
+          <p:cNvPr id="15" name="Text 10"/>
+          <p:cNvSpPr/>
+          <p:nvPr/>
+        </p:nvSpPr>
+        <p:spPr>
+          <a:xfrm>
+            <a:off x="4572000" y="3474720"/>
+            <a:ext cx="3063240" cy="365760"/>
+          </a:xfrm>
+          <a:prstGeom prst="rect">
+            <a:avLst/>
+          </a:prstGeom>
+          <a:noFill/>
+          <a:ln/>
+        </p:spPr>
+        <p:txBody>
+          <a:bodyPr wrap="square" rtlCol="0" anchor="ctr"/>
+          <a:lstStyle/>
+          <a:p>
+            <a:pPr marL="0" indent="0" algn="ctr">
+              <a:buNone/>
+            </a:pPr>
+            <a:r>
+              <a:rPr lang="en-US" sz="1700" b="1" dirty="0">
+                <a:solidFill>
+                  <a:srgbClr val="1B2B2B"/>
+                </a:solidFill>
+                <a:latin typeface="Calibri" pitchFamily="34" charset="0"/>
+                <a:ea typeface="Calibri" pitchFamily="34" charset="-122"/>
+                <a:cs typeface="Calibri" pitchFamily="34" charset="-120"/>
+              </a:rPr>
+              <a:t>Usability</a:t>
+            </a:r>
+            <a:endParaRPr lang="en-US" sz="1700" dirty="0"/>
+          </a:p>
+        </p:txBody>
+      </p:sp>
+      <p:sp>
+        <p:nvSpPr>
+          <p:cNvPr id="16" name="Text 11"/>
+          <p:cNvSpPr/>
+          <p:nvPr/>
+        </p:nvSpPr>
+        <p:spPr>
+          <a:xfrm>
+            <a:off x="4617720" y="3886200"/>
+            <a:ext cx="2971800" cy="1554480"/>
+          </a:xfrm>
+          <a:prstGeom prst="rect">
+            <a:avLst/>
+          </a:prstGeom>
+          <a:noFill/>
+          <a:ln/>
+        </p:spPr>
+        <p:txBody>
+          <a:bodyPr wrap="square" rtlCol="0" anchor="ctr"/>
+          <a:lstStyle/>
+          <a:p>
+            <a:pPr marL="0" indent="0" algn="ctr">
+              <a:buNone/>
+            </a:pPr>
+            <a:r>
+              <a:rPr lang="en-US" sz="1300" dirty="0">
+                <a:solidFill>
+                  <a:srgbClr val="5A6B6B"/>
+                </a:solidFill>
+                <a:latin typeface="Calibri" pitchFamily="34" charset="0"/>
+                <a:ea typeface="Calibri" pitchFamily="34" charset="-122"/>
+                <a:cs typeface="Calibri" pitchFamily="34" charset="-120"/>
+              </a:rPr>
+              <a:t>An app's text is so small or low-contrast that you genuinely can't read it.</a:t>
+            </a:r>
+            <a:endParaRPr lang="en-US" sz="1300" dirty="0"/>
+          </a:p>
+        </p:txBody>
+      </p:sp>
+      <p:sp>
+        <p:nvSpPr>
+          <p:cNvPr id="17" name="Shape 12"/>
+          <p:cNvSpPr/>
+          <p:nvPr/>
+        </p:nvSpPr>
+        <p:spPr>
+          <a:xfrm>
+            <a:off x="8138160" y="2331720"/>
+            <a:ext cx="3429000" cy="3291840"/>
+          </a:xfrm>
+          <a:prstGeom prst="roundRect">
+            <a:avLst>
+              <a:gd name="adj" fmla="val 3333"/>
+            </a:avLst>
+          </a:prstGeom>
+          <a:solidFill>
+            <a:srgbClr val="F2F7F7"/>
+          </a:solidFill>
+          <a:ln/>
+        </p:spPr>
+        <p:txBody>
+          <a:bodyPr/>
+          <a:lstStyle/>
+          <a:p>
+            <a:endParaRPr lang="en-US"/>
+          </a:p>
+        </p:txBody>
+      </p:sp>
+      <p:sp>
+        <p:nvSpPr>
+          <p:cNvPr id="18" name="Shape 13"/>
+          <p:cNvSpPr/>
+          <p:nvPr/>
+        </p:nvSpPr>
+        <p:spPr>
+          <a:xfrm>
+            <a:off x="9486900" y="2606040"/>
+            <a:ext cx="731520" cy="731520"/>
+          </a:xfrm>
+          <a:prstGeom prst="ellipse">
+            <a:avLst/>
+          </a:prstGeom>
+          <a:solidFill>
+            <a:srgbClr val="00A896"/>
+          </a:solidFill>
+          <a:ln/>
+        </p:spPr>
+        <p:txBody>
+          <a:bodyPr/>
+          <a:lstStyle/>
+          <a:p>
+            <a:endParaRPr lang="en-US"/>
+          </a:p>
+        </p:txBody>
+      </p:sp>
+      <p:pic>
+        <p:nvPicPr>
+          <p:cNvPr id="19" name="Image 3" descr="preencoded.png"/>
+          <p:cNvPicPr>
+            <a:picLocks noChangeAspect="1"/>
+          </p:cNvPicPr>
+          <p:nvPr/>
+        </p:nvPicPr>
+        <p:blipFill>
+          <a:blip r:embed="rId5"/>
+          <a:stretch>
+            <a:fillRect/>
+          </a:stretch>
+        </p:blipFill>
+        <p:spPr>
+          <a:xfrm>
             <a:off x="9662465" y="2781605"/>
             <a:ext cx="380390" cy="380390"/>
           </a:xfrm>
@@ -6820,7 +6799,7 @@
           <a:bodyPr wrap="square" rtlCol="0" anchor="ctr"/>
           <a:lstStyle/>
           <a:p>
-            <a:pPr algn="ctr" indent="0" marL="0">
+            <a:pPr marL="0" indent="0" algn="ctr">
               <a:buNone/>
             </a:pPr>
             <a:r>
@@ -6859,7 +6838,7 @@
           <a:bodyPr wrap="square" rtlCol="0" anchor="ctr"/>
           <a:lstStyle/>
           <a:p>
-            <a:pPr algn="ctr" indent="0" marL="0">
+            <a:pPr marL="0" indent="0" algn="ctr">
               <a:buNone/>
             </a:pPr>
             <a:r>
@@ -6898,7 +6877,7 @@
           <a:bodyPr wrap="square" rtlCol="0" anchor="ctr"/>
           <a:lstStyle/>
           <a:p>
-            <a:pPr algn="r" indent="0" marL="0">
+            <a:pPr marL="0" indent="0" algn="r">
               <a:buNone/>
             </a:pPr>
             <a:r>
@@ -6932,6 +6911,7 @@
         <a:solidFill>
           <a:srgbClr val="FFFFFF"/>
         </a:solidFill>
+        <a:effectLst/>
       </p:bgPr>
     </p:bg>
     <p:spTree>
@@ -6969,11 +6949,11 @@
           <a:bodyPr wrap="square" rtlCol="0" anchor="ctr"/>
           <a:lstStyle/>
           <a:p>
-            <a:pPr indent="0" marL="0">
-              <a:buNone/>
-            </a:pPr>
-            <a:r>
-              <a:rPr lang="en-US" sz="1300" b="1" spc="200" kern="0" dirty="0">
+            <a:pPr marL="0" indent="0">
+              <a:buNone/>
+            </a:pPr>
+            <a:r>
+              <a:rPr lang="en-US" sz="1300" b="1" kern="0" spc="200" dirty="0">
                 <a:solidFill>
                   <a:srgbClr val="00A896"/>
                 </a:solidFill>
@@ -7008,7 +6988,7 @@
           <a:bodyPr wrap="square" rtlCol="0" anchor="ctr"/>
           <a:lstStyle/>
           <a:p>
-            <a:pPr indent="0" marL="0">
+            <a:pPr marL="0" indent="0">
               <a:buNone/>
             </a:pPr>
             <a:r>
@@ -7047,6 +7027,13 @@
           </a:solidFill>
           <a:ln/>
         </p:spPr>
+        <p:txBody>
+          <a:bodyPr/>
+          <a:lstStyle/>
+          <a:p>
+            <a:endParaRPr lang="en-US"/>
+          </a:p>
+        </p:txBody>
       </p:sp>
       <p:sp>
         <p:nvSpPr>
@@ -7069,6 +7056,13 @@
           </a:solidFill>
           <a:ln/>
         </p:spPr>
+        <p:txBody>
+          <a:bodyPr/>
+          <a:lstStyle/>
+          <a:p>
+            <a:endParaRPr lang="en-US"/>
+          </a:p>
+        </p:txBody>
       </p:sp>
       <p:sp>
         <p:nvSpPr>
@@ -7091,11 +7085,11 @@
           <a:bodyPr wrap="square" rtlCol="0" anchor="ctr"/>
           <a:lstStyle/>
           <a:p>
-            <a:pPr indent="0" marL="0">
-              <a:buNone/>
-            </a:pPr>
-            <a:r>
-              <a:rPr lang="en-US" sz="1500" b="1" spc="200" kern="0" dirty="0">
+            <a:pPr marL="0" indent="0">
+              <a:buNone/>
+            </a:pPr>
+            <a:r>
+              <a:rPr lang="en-US" sz="1500" b="1" kern="0" spc="200" dirty="0">
                 <a:solidFill>
                   <a:srgbClr val="FFFFFF"/>
                 </a:solidFill>
@@ -7130,7 +7124,7 @@
           <a:bodyPr wrap="square" rtlCol="0" anchor="ctr"/>
           <a:lstStyle/>
           <a:p>
-            <a:pPr indent="0" marL="0">
+            <a:pPr marL="0" indent="0">
               <a:buNone/>
             </a:pPr>
             <a:r>
@@ -7256,11 +7250,11 @@
           <a:bodyPr wrap="square" rtlCol="0" anchor="ctr"/>
           <a:lstStyle/>
           <a:p>
-            <a:pPr indent="0" marL="0">
-              <a:buNone/>
-            </a:pPr>
-            <a:r>
-              <a:rPr lang="en-US" sz="1500" b="1" spc="200" kern="0" dirty="0">
+            <a:pPr marL="0" indent="0">
+              <a:buNone/>
+            </a:pPr>
+            <a:r>
+              <a:rPr lang="en-US" sz="1500" b="1" kern="0" spc="200" dirty="0">
                 <a:solidFill>
                   <a:srgbClr val="028090"/>
                 </a:solidFill>
@@ -7295,7 +7289,7 @@
           <a:bodyPr wrap="square" rtlCol="0" anchor="ctr"/>
           <a:lstStyle/>
           <a:p>
-            <a:pPr indent="0" marL="0">
+            <a:pPr marL="0" indent="0">
               <a:buNone/>
             </a:pPr>
             <a:r>
@@ -7421,7 +7415,7 @@
           <a:bodyPr wrap="square" rtlCol="0" anchor="ctr"/>
           <a:lstStyle/>
           <a:p>
-            <a:pPr algn="r" indent="0" marL="0">
+            <a:pPr marL="0" indent="0" algn="r">
               <a:buNone/>
             </a:pPr>
             <a:r>
@@ -7455,6 +7449,7 @@
         <a:solidFill>
           <a:srgbClr val="FFFFFF"/>
         </a:solidFill>
+        <a:effectLst/>
       </p:bgPr>
     </p:bg>
     <p:spTree>
@@ -7492,11 +7487,11 @@
           <a:bodyPr wrap="square" rtlCol="0" anchor="ctr"/>
           <a:lstStyle/>
           <a:p>
-            <a:pPr indent="0" marL="0">
-              <a:buNone/>
-            </a:pPr>
-            <a:r>
-              <a:rPr lang="en-US" sz="1300" b="1" spc="200" kern="0" dirty="0">
+            <a:pPr marL="0" indent="0">
+              <a:buNone/>
+            </a:pPr>
+            <a:r>
+              <a:rPr lang="en-US" sz="1300" b="1" kern="0" spc="200" dirty="0">
                 <a:solidFill>
                   <a:srgbClr val="00A896"/>
                 </a:solidFill>
@@ -7529,17 +7524,24 @@
           </a:solidFill>
           <a:ln/>
         </p:spPr>
+        <p:txBody>
+          <a:bodyPr/>
+          <a:lstStyle/>
+          <a:p>
+            <a:endParaRPr lang="en-US"/>
+          </a:p>
+        </p:txBody>
       </p:sp>
       <p:pic>
         <p:nvPicPr>
-          <p:cNvPr id="4" name="Image 0" descr="preencoded.png">    </p:cNvPr>
+          <p:cNvPr id="4" name="Image 0" descr="preencoded.png"/>
           <p:cNvPicPr>
             <a:picLocks noChangeAspect="1"/>
           </p:cNvPicPr>
           <p:nvPr/>
         </p:nvPicPr>
         <p:blipFill>
-          <a:blip r:embed="rId1"/>
+          <a:blip r:embed="rId3"/>
           <a:stretch>
             <a:fillRect/>
           </a:stretch>
@@ -7575,7 +7577,7 @@
           <a:bodyPr wrap="square" rtlCol="0" anchor="ctr"/>
           <a:lstStyle/>
           <a:p>
-            <a:pPr indent="0" marL="0">
+            <a:pPr marL="0" indent="0">
               <a:buNone/>
             </a:pPr>
             <a:r>
@@ -7614,6 +7616,13 @@
           </a:solidFill>
           <a:ln/>
         </p:spPr>
+        <p:txBody>
+          <a:bodyPr/>
+          <a:lstStyle/>
+          <a:p>
+            <a:endParaRPr lang="en-US"/>
+          </a:p>
+        </p:txBody>
       </p:sp>
       <p:sp>
         <p:nvSpPr>
@@ -7634,6 +7643,13 @@
           </a:solidFill>
           <a:ln/>
         </p:spPr>
+        <p:txBody>
+          <a:bodyPr/>
+          <a:lstStyle/>
+          <a:p>
+            <a:endParaRPr lang="en-US"/>
+          </a:p>
+        </p:txBody>
       </p:sp>
       <p:sp>
         <p:nvSpPr>
@@ -7656,7 +7672,7 @@
           <a:bodyPr wrap="square" rtlCol="0" anchor="ctr"/>
           <a:lstStyle/>
           <a:p>
-            <a:pPr algn="ctr" indent="0" marL="0">
+            <a:pPr marL="0" indent="0" algn="ctr">
               <a:buNone/>
             </a:pPr>
             <a:r>
@@ -7695,7 +7711,7 @@
           <a:bodyPr wrap="square" rtlCol="0" anchor="ctr"/>
           <a:lstStyle/>
           <a:p>
-            <a:pPr indent="0" marL="0">
+            <a:pPr marL="0" indent="0">
               <a:buNone/>
             </a:pPr>
             <a:r>
@@ -7734,6 +7750,13 @@
           </a:solidFill>
           <a:ln/>
         </p:spPr>
+        <p:txBody>
+          <a:bodyPr/>
+          <a:lstStyle/>
+          <a:p>
+            <a:endParaRPr lang="en-US"/>
+          </a:p>
+        </p:txBody>
       </p:sp>
       <p:sp>
         <p:nvSpPr>
@@ -7754,6 +7777,13 @@
           </a:solidFill>
           <a:ln/>
         </p:spPr>
+        <p:txBody>
+          <a:bodyPr/>
+          <a:lstStyle/>
+          <a:p>
+            <a:endParaRPr lang="en-US"/>
+          </a:p>
+        </p:txBody>
       </p:sp>
       <p:sp>
         <p:nvSpPr>
@@ -7776,7 +7806,7 @@
           <a:bodyPr wrap="square" rtlCol="0" anchor="ctr"/>
           <a:lstStyle/>
           <a:p>
-            <a:pPr algn="ctr" indent="0" marL="0">
+            <a:pPr marL="0" indent="0" algn="ctr">
               <a:buNone/>
             </a:pPr>
             <a:r>
@@ -7815,7 +7845,7 @@
           <a:bodyPr wrap="square" rtlCol="0" anchor="ctr"/>
           <a:lstStyle/>
           <a:p>
-            <a:pPr indent="0" marL="0">
+            <a:pPr marL="0" indent="0">
               <a:buNone/>
             </a:pPr>
             <a:r>
@@ -7854,7 +7884,7 @@
           <a:bodyPr wrap="square" rtlCol="0" anchor="ctr"/>
           <a:lstStyle/>
           <a:p>
-            <a:pPr algn="r" indent="0" marL="0">
+            <a:pPr marL="0" indent="0" algn="r">
               <a:buNone/>
             </a:pPr>
             <a:r>
@@ -7888,6 +7918,7 @@
         <a:solidFill>
           <a:srgbClr val="FFFFFF"/>
         </a:solidFill>
+        <a:effectLst/>
       </p:bgPr>
     </p:bg>
     <p:spTree>
@@ -7925,11 +7956,11 @@
           <a:bodyPr wrap="square" rtlCol="0" anchor="ctr"/>
           <a:lstStyle/>
           <a:p>
-            <a:pPr indent="0" marL="0">
-              <a:buNone/>
-            </a:pPr>
-            <a:r>
-              <a:rPr lang="en-US" sz="1300" b="1" spc="200" kern="0" dirty="0">
+            <a:pPr marL="0" indent="0">
+              <a:buNone/>
+            </a:pPr>
+            <a:r>
+              <a:rPr lang="en-US" sz="1300" b="1" kern="0" spc="200" dirty="0">
                 <a:solidFill>
                   <a:srgbClr val="00A896"/>
                 </a:solidFill>
@@ -7964,7 +7995,7 @@
           <a:bodyPr wrap="square" rtlCol="0" anchor="ctr"/>
           <a:lstStyle/>
           <a:p>
-            <a:pPr indent="0" marL="0">
+            <a:pPr marL="0" indent="0">
               <a:buNone/>
             </a:pPr>
             <a:r>
@@ -8003,6 +8034,13 @@
           </a:solidFill>
           <a:ln/>
         </p:spPr>
+        <p:txBody>
+          <a:bodyPr/>
+          <a:lstStyle/>
+          <a:p>
+            <a:endParaRPr lang="en-US"/>
+          </a:p>
+        </p:txBody>
       </p:sp>
       <p:sp>
         <p:nvSpPr>
@@ -8025,6 +8063,13 @@
           </a:solidFill>
           <a:ln/>
         </p:spPr>
+        <p:txBody>
+          <a:bodyPr/>
+          <a:lstStyle/>
+          <a:p>
+            <a:endParaRPr lang="en-US"/>
+          </a:p>
+        </p:txBody>
       </p:sp>
       <p:sp>
         <p:nvSpPr>
@@ -8045,276 +8090,17 @@
           </a:solidFill>
           <a:ln/>
         </p:spPr>
+        <p:txBody>
+          <a:bodyPr/>
+          <a:lstStyle/>
+          <a:p>
+            <a:endParaRPr lang="en-US"/>
+          </a:p>
+        </p:txBody>
       </p:sp>
       <p:pic>
         <p:nvPicPr>
-          <p:cNvPr id="7" name="Image 0" descr="preencoded.png">    </p:cNvPr>
-          <p:cNvPicPr>
-            <a:picLocks noChangeAspect="1"/>
-          </p:cNvPicPr>
-          <p:nvPr/>
-        </p:nvPicPr>
-        <p:blipFill>
-          <a:blip r:embed="rId1"/>
-          <a:stretch>
-            <a:fillRect/>
-          </a:stretch>
-        </p:blipFill>
-        <p:spPr>
-          <a:xfrm>
-            <a:off x="1181405" y="2095805"/>
-            <a:ext cx="380390" cy="380390"/>
-          </a:xfrm>
-          <a:prstGeom prst="rect">
-            <a:avLst/>
-          </a:prstGeom>
-        </p:spPr>
-      </p:pic>
-      <p:sp>
-        <p:nvSpPr>
-          <p:cNvPr id="8" name="Text 5"/>
-          <p:cNvSpPr/>
-          <p:nvPr/>
-        </p:nvSpPr>
-        <p:spPr>
-          <a:xfrm>
-            <a:off x="1920240" y="2011680"/>
-            <a:ext cx="3794760" cy="548640"/>
-          </a:xfrm>
-          <a:prstGeom prst="rect">
-            <a:avLst/>
-          </a:prstGeom>
-          <a:noFill/>
-          <a:ln/>
-        </p:spPr>
-        <p:txBody>
-          <a:bodyPr wrap="square" rtlCol="0" anchor="ctr"/>
-          <a:lstStyle/>
-          <a:p>
-            <a:pPr indent="0" marL="0">
-              <a:buNone/>
-            </a:pPr>
-            <a:r>
-              <a:rPr lang="en-US" sz="1900" b="1" dirty="0">
-                <a:solidFill>
-                  <a:srgbClr val="FFFFFF"/>
-                </a:solidFill>
-                <a:latin typeface="Calibri" pitchFamily="34" charset="0"/>
-                <a:ea typeface="Calibri" pitchFamily="34" charset="-122"/>
-                <a:cs typeface="Calibri" pitchFamily="34" charset="-120"/>
-              </a:rPr>
-              <a:t>Black Box Testing</a:t>
-            </a:r>
-            <a:endParaRPr lang="en-US" sz="1900" dirty="0"/>
-          </a:p>
-        </p:txBody>
-      </p:sp>
-      <p:sp>
-        <p:nvSpPr>
-          <p:cNvPr id="9" name="Text 6"/>
-          <p:cNvSpPr/>
-          <p:nvPr/>
-        </p:nvSpPr>
-        <p:spPr>
-          <a:xfrm>
-            <a:off x="1005840" y="2834640"/>
-            <a:ext cx="4709160" cy="1828800"/>
-          </a:xfrm>
-          <a:prstGeom prst="rect">
-            <a:avLst/>
-          </a:prstGeom>
-          <a:noFill/>
-          <a:ln/>
-        </p:spPr>
-        <p:txBody>
-          <a:bodyPr wrap="square" rtlCol="0" anchor="ctr"/>
-          <a:lstStyle/>
-          <a:p>
-            <a:pPr indent="0" marL="0">
-              <a:buNone/>
-            </a:pPr>
-            <a:r>
-              <a:rPr lang="en-US" sz="1450" dirty="0">
-                <a:solidFill>
-                  <a:srgbClr val="E7F6F2"/>
-                </a:solidFill>
-                <a:latin typeface="Calibri" pitchFamily="34" charset="0"/>
-                <a:ea typeface="Calibri" pitchFamily="34" charset="-122"/>
-                <a:cs typeface="Calibri" pitchFamily="34" charset="-120"/>
-              </a:rPr>
-              <a:t>Testing from the outside, like a real user. You click, you type, you observe — you don't need to see or understand the code underneath. This is almost everything you'll do as a junior QA tester.</a:t>
-            </a:r>
-            <a:endParaRPr lang="en-US" sz="1450" dirty="0"/>
-          </a:p>
-        </p:txBody>
-      </p:sp>
-      <p:sp>
-        <p:nvSpPr>
-          <p:cNvPr id="10" name="Shape 7"/>
-          <p:cNvSpPr/>
-          <p:nvPr/>
-        </p:nvSpPr>
-        <p:spPr>
-          <a:xfrm>
-            <a:off x="6446520" y="1920240"/>
-            <a:ext cx="731520" cy="731520"/>
-          </a:xfrm>
-          <a:prstGeom prst="ellipse">
-            <a:avLst/>
-          </a:prstGeom>
-          <a:solidFill>
-            <a:srgbClr val="028090"/>
-          </a:solidFill>
-          <a:ln/>
-        </p:spPr>
-      </p:sp>
-      <p:pic>
-        <p:nvPicPr>
-          <p:cNvPr id="11" name="Image 1" descr="preencoded.png">    </p:cNvPr>
-          <p:cNvPicPr>
-            <a:picLocks noChangeAspect="1"/>
-          </p:cNvPicPr>
-          <p:nvPr/>
-        </p:nvPicPr>
-        <p:blipFill>
-          <a:blip r:embed="rId2"/>
-          <a:stretch>
-            <a:fillRect/>
-          </a:stretch>
-        </p:blipFill>
-        <p:spPr>
-          <a:xfrm>
-            <a:off x="6622085" y="2095805"/>
-            <a:ext cx="380390" cy="380390"/>
-          </a:xfrm>
-          <a:prstGeom prst="rect">
-            <a:avLst/>
-          </a:prstGeom>
-        </p:spPr>
-      </p:pic>
-      <p:sp>
-        <p:nvSpPr>
-          <p:cNvPr id="12" name="Text 8"/>
-          <p:cNvSpPr/>
-          <p:nvPr/>
-        </p:nvSpPr>
-        <p:spPr>
-          <a:xfrm>
-            <a:off x="7360920" y="2011680"/>
-            <a:ext cx="3794760" cy="548640"/>
-          </a:xfrm>
-          <a:prstGeom prst="rect">
-            <a:avLst/>
-          </a:prstGeom>
-          <a:noFill/>
-          <a:ln/>
-        </p:spPr>
-        <p:txBody>
-          <a:bodyPr wrap="square" rtlCol="0" anchor="ctr"/>
-          <a:lstStyle/>
-          <a:p>
-            <a:pPr indent="0" marL="0">
-              <a:buNone/>
-            </a:pPr>
-            <a:r>
-              <a:rPr lang="en-US" sz="1900" b="1" dirty="0">
-                <a:solidFill>
-                  <a:srgbClr val="1B2B2B"/>
-                </a:solidFill>
-                <a:latin typeface="Calibri" pitchFamily="34" charset="0"/>
-                <a:ea typeface="Calibri" pitchFamily="34" charset="-122"/>
-                <a:cs typeface="Calibri" pitchFamily="34" charset="-120"/>
-              </a:rPr>
-              <a:t>White Box Testing</a:t>
-            </a:r>
-            <a:endParaRPr lang="en-US" sz="1900" dirty="0"/>
-          </a:p>
-        </p:txBody>
-      </p:sp>
-      <p:sp>
-        <p:nvSpPr>
-          <p:cNvPr id="13" name="Text 9"/>
-          <p:cNvSpPr/>
-          <p:nvPr/>
-        </p:nvSpPr>
-        <p:spPr>
-          <a:xfrm>
-            <a:off x="6446520" y="2834640"/>
-            <a:ext cx="4709160" cy="1828800"/>
-          </a:xfrm>
-          <a:prstGeom prst="rect">
-            <a:avLst/>
-          </a:prstGeom>
-          <a:noFill/>
-          <a:ln/>
-        </p:spPr>
-        <p:txBody>
-          <a:bodyPr wrap="square" rtlCol="0" anchor="ctr"/>
-          <a:lstStyle/>
-          <a:p>
-            <a:pPr indent="0" marL="0">
-              <a:buNone/>
-            </a:pPr>
-            <a:r>
-              <a:rPr lang="en-US" sz="1450" dirty="0">
-                <a:solidFill>
-                  <a:srgbClr val="1B2B2B"/>
-                </a:solidFill>
-                <a:latin typeface="Calibri" pitchFamily="34" charset="0"/>
-                <a:ea typeface="Calibri" pitchFamily="34" charset="-122"/>
-                <a:cs typeface="Calibri" pitchFamily="34" charset="-120"/>
-              </a:rPr>
-              <a:t>Testing with knowledge of what's happening inside — the actual code, logic, and database. Usually done by developers or senior technical testers.</a:t>
-            </a:r>
-            <a:endParaRPr lang="en-US" sz="1450" dirty="0"/>
-          </a:p>
-        </p:txBody>
-      </p:sp>
-      <p:sp>
-        <p:nvSpPr>
-          <p:cNvPr id="14" name="Shape 10"/>
-          <p:cNvSpPr/>
-          <p:nvPr/>
-        </p:nvSpPr>
-        <p:spPr>
-          <a:xfrm>
-            <a:off x="640080" y="5029200"/>
-            <a:ext cx="10881360" cy="1188720"/>
-          </a:xfrm>
-          <a:prstGeom prst="roundRect">
-            <a:avLst>
-              <a:gd name="adj" fmla="val 9231"/>
-            </a:avLst>
-          </a:prstGeom>
-          <a:solidFill>
-            <a:srgbClr val="02C39A"/>
-          </a:solidFill>
-          <a:ln/>
-        </p:spPr>
-      </p:sp>
-      <p:sp>
-        <p:nvSpPr>
-          <p:cNvPr id="15" name="Shape 11"/>
-          <p:cNvSpPr/>
-          <p:nvPr/>
-        </p:nvSpPr>
-        <p:spPr>
-          <a:xfrm>
-            <a:off x="914400" y="5239512"/>
-            <a:ext cx="777240" cy="777240"/>
-          </a:xfrm>
-          <a:prstGeom prst="ellipse">
-            <a:avLst/>
-          </a:prstGeom>
-          <a:solidFill>
-            <a:srgbClr val="FFFFFF"/>
-          </a:solidFill>
-          <a:ln/>
-        </p:spPr>
-      </p:sp>
-      <p:pic>
-        <p:nvPicPr>
-          <p:cNvPr id="16" name="Image 2" descr="preencoded.png">    </p:cNvPr>
+          <p:cNvPr id="7" name="Image 0" descr="preencoded.png"/>
           <p:cNvPicPr>
             <a:picLocks noChangeAspect="1"/>
           </p:cNvPicPr>
@@ -8328,6 +8114,293 @@
         </p:blipFill>
         <p:spPr>
           <a:xfrm>
+            <a:off x="1181405" y="2095805"/>
+            <a:ext cx="380390" cy="380390"/>
+          </a:xfrm>
+          <a:prstGeom prst="rect">
+            <a:avLst/>
+          </a:prstGeom>
+        </p:spPr>
+      </p:pic>
+      <p:sp>
+        <p:nvSpPr>
+          <p:cNvPr id="8" name="Text 5"/>
+          <p:cNvSpPr/>
+          <p:nvPr/>
+        </p:nvSpPr>
+        <p:spPr>
+          <a:xfrm>
+            <a:off x="1920240" y="2011680"/>
+            <a:ext cx="3794760" cy="548640"/>
+          </a:xfrm>
+          <a:prstGeom prst="rect">
+            <a:avLst/>
+          </a:prstGeom>
+          <a:noFill/>
+          <a:ln/>
+        </p:spPr>
+        <p:txBody>
+          <a:bodyPr wrap="square" rtlCol="0" anchor="ctr"/>
+          <a:lstStyle/>
+          <a:p>
+            <a:pPr marL="0" indent="0">
+              <a:buNone/>
+            </a:pPr>
+            <a:r>
+              <a:rPr lang="en-US" sz="1900" b="1" dirty="0">
+                <a:solidFill>
+                  <a:srgbClr val="FFFFFF"/>
+                </a:solidFill>
+                <a:latin typeface="Calibri" pitchFamily="34" charset="0"/>
+                <a:ea typeface="Calibri" pitchFamily="34" charset="-122"/>
+                <a:cs typeface="Calibri" pitchFamily="34" charset="-120"/>
+              </a:rPr>
+              <a:t>Black Box Testing</a:t>
+            </a:r>
+            <a:endParaRPr lang="en-US" sz="1900" dirty="0"/>
+          </a:p>
+        </p:txBody>
+      </p:sp>
+      <p:sp>
+        <p:nvSpPr>
+          <p:cNvPr id="9" name="Text 6"/>
+          <p:cNvSpPr/>
+          <p:nvPr/>
+        </p:nvSpPr>
+        <p:spPr>
+          <a:xfrm>
+            <a:off x="1005840" y="2834640"/>
+            <a:ext cx="4709160" cy="1828800"/>
+          </a:xfrm>
+          <a:prstGeom prst="rect">
+            <a:avLst/>
+          </a:prstGeom>
+          <a:noFill/>
+          <a:ln/>
+        </p:spPr>
+        <p:txBody>
+          <a:bodyPr wrap="square" rtlCol="0" anchor="ctr"/>
+          <a:lstStyle/>
+          <a:p>
+            <a:pPr marL="0" indent="0">
+              <a:buNone/>
+            </a:pPr>
+            <a:r>
+              <a:rPr lang="en-US" sz="1450" dirty="0">
+                <a:solidFill>
+                  <a:srgbClr val="E7F6F2"/>
+                </a:solidFill>
+                <a:latin typeface="Calibri" pitchFamily="34" charset="0"/>
+                <a:ea typeface="Calibri" pitchFamily="34" charset="-122"/>
+                <a:cs typeface="Calibri" pitchFamily="34" charset="-120"/>
+              </a:rPr>
+              <a:t>Testing from the outside, like a real user. You click, you type, you observe — you don't need to see or understand the code underneath. This is almost everything you'll do as a junior QA tester.</a:t>
+            </a:r>
+            <a:endParaRPr lang="en-US" sz="1450" dirty="0"/>
+          </a:p>
+        </p:txBody>
+      </p:sp>
+      <p:sp>
+        <p:nvSpPr>
+          <p:cNvPr id="10" name="Shape 7"/>
+          <p:cNvSpPr/>
+          <p:nvPr/>
+        </p:nvSpPr>
+        <p:spPr>
+          <a:xfrm>
+            <a:off x="6446520" y="1920240"/>
+            <a:ext cx="731520" cy="731520"/>
+          </a:xfrm>
+          <a:prstGeom prst="ellipse">
+            <a:avLst/>
+          </a:prstGeom>
+          <a:solidFill>
+            <a:srgbClr val="028090"/>
+          </a:solidFill>
+          <a:ln/>
+        </p:spPr>
+        <p:txBody>
+          <a:bodyPr/>
+          <a:lstStyle/>
+          <a:p>
+            <a:endParaRPr lang="en-US"/>
+          </a:p>
+        </p:txBody>
+      </p:sp>
+      <p:pic>
+        <p:nvPicPr>
+          <p:cNvPr id="11" name="Image 1" descr="preencoded.png"/>
+          <p:cNvPicPr>
+            <a:picLocks noChangeAspect="1"/>
+          </p:cNvPicPr>
+          <p:nvPr/>
+        </p:nvPicPr>
+        <p:blipFill>
+          <a:blip r:embed="rId4"/>
+          <a:stretch>
+            <a:fillRect/>
+          </a:stretch>
+        </p:blipFill>
+        <p:spPr>
+          <a:xfrm>
+            <a:off x="6622085" y="2095805"/>
+            <a:ext cx="380390" cy="380390"/>
+          </a:xfrm>
+          <a:prstGeom prst="rect">
+            <a:avLst/>
+          </a:prstGeom>
+        </p:spPr>
+      </p:pic>
+      <p:sp>
+        <p:nvSpPr>
+          <p:cNvPr id="12" name="Text 8"/>
+          <p:cNvSpPr/>
+          <p:nvPr/>
+        </p:nvSpPr>
+        <p:spPr>
+          <a:xfrm>
+            <a:off x="7360920" y="2011680"/>
+            <a:ext cx="3794760" cy="548640"/>
+          </a:xfrm>
+          <a:prstGeom prst="rect">
+            <a:avLst/>
+          </a:prstGeom>
+          <a:noFill/>
+          <a:ln/>
+        </p:spPr>
+        <p:txBody>
+          <a:bodyPr wrap="square" rtlCol="0" anchor="ctr"/>
+          <a:lstStyle/>
+          <a:p>
+            <a:pPr marL="0" indent="0">
+              <a:buNone/>
+            </a:pPr>
+            <a:r>
+              <a:rPr lang="en-US" sz="1900" b="1" dirty="0">
+                <a:solidFill>
+                  <a:srgbClr val="1B2B2B"/>
+                </a:solidFill>
+                <a:latin typeface="Calibri" pitchFamily="34" charset="0"/>
+                <a:ea typeface="Calibri" pitchFamily="34" charset="-122"/>
+                <a:cs typeface="Calibri" pitchFamily="34" charset="-120"/>
+              </a:rPr>
+              <a:t>White Box Testing</a:t>
+            </a:r>
+            <a:endParaRPr lang="en-US" sz="1900" dirty="0"/>
+          </a:p>
+        </p:txBody>
+      </p:sp>
+      <p:sp>
+        <p:nvSpPr>
+          <p:cNvPr id="13" name="Text 9"/>
+          <p:cNvSpPr/>
+          <p:nvPr/>
+        </p:nvSpPr>
+        <p:spPr>
+          <a:xfrm>
+            <a:off x="6446520" y="2834640"/>
+            <a:ext cx="4709160" cy="1828800"/>
+          </a:xfrm>
+          <a:prstGeom prst="rect">
+            <a:avLst/>
+          </a:prstGeom>
+          <a:noFill/>
+          <a:ln/>
+        </p:spPr>
+        <p:txBody>
+          <a:bodyPr wrap="square" rtlCol="0" anchor="ctr"/>
+          <a:lstStyle/>
+          <a:p>
+            <a:pPr marL="0" indent="0">
+              <a:buNone/>
+            </a:pPr>
+            <a:r>
+              <a:rPr lang="en-US" sz="1450" dirty="0">
+                <a:solidFill>
+                  <a:srgbClr val="1B2B2B"/>
+                </a:solidFill>
+                <a:latin typeface="Calibri" pitchFamily="34" charset="0"/>
+                <a:ea typeface="Calibri" pitchFamily="34" charset="-122"/>
+                <a:cs typeface="Calibri" pitchFamily="34" charset="-120"/>
+              </a:rPr>
+              <a:t>Testing with knowledge of what's happening inside — the actual code, logic, and database. Usually done by developers or senior technical testers.</a:t>
+            </a:r>
+            <a:endParaRPr lang="en-US" sz="1450" dirty="0"/>
+          </a:p>
+        </p:txBody>
+      </p:sp>
+      <p:sp>
+        <p:nvSpPr>
+          <p:cNvPr id="14" name="Shape 10"/>
+          <p:cNvSpPr/>
+          <p:nvPr/>
+        </p:nvSpPr>
+        <p:spPr>
+          <a:xfrm>
+            <a:off x="640080" y="5029200"/>
+            <a:ext cx="10881360" cy="1188720"/>
+          </a:xfrm>
+          <a:prstGeom prst="roundRect">
+            <a:avLst>
+              <a:gd name="adj" fmla="val 9231"/>
+            </a:avLst>
+          </a:prstGeom>
+          <a:solidFill>
+            <a:srgbClr val="02C39A"/>
+          </a:solidFill>
+          <a:ln/>
+        </p:spPr>
+        <p:txBody>
+          <a:bodyPr/>
+          <a:lstStyle/>
+          <a:p>
+            <a:endParaRPr lang="en-US"/>
+          </a:p>
+        </p:txBody>
+      </p:sp>
+      <p:sp>
+        <p:nvSpPr>
+          <p:cNvPr id="15" name="Shape 11"/>
+          <p:cNvSpPr/>
+          <p:nvPr/>
+        </p:nvSpPr>
+        <p:spPr>
+          <a:xfrm>
+            <a:off x="914400" y="5239512"/>
+            <a:ext cx="777240" cy="777240"/>
+          </a:xfrm>
+          <a:prstGeom prst="ellipse">
+            <a:avLst/>
+          </a:prstGeom>
+          <a:solidFill>
+            <a:srgbClr val="FFFFFF"/>
+          </a:solidFill>
+          <a:ln/>
+        </p:spPr>
+        <p:txBody>
+          <a:bodyPr/>
+          <a:lstStyle/>
+          <a:p>
+            <a:endParaRPr lang="en-US"/>
+          </a:p>
+        </p:txBody>
+      </p:sp>
+      <p:pic>
+        <p:nvPicPr>
+          <p:cNvPr id="16" name="Image 2" descr="preencoded.png"/>
+          <p:cNvPicPr>
+            <a:picLocks noChangeAspect="1"/>
+          </p:cNvPicPr>
+          <p:nvPr/>
+        </p:nvPicPr>
+        <p:blipFill>
+          <a:blip r:embed="rId5"/>
+          <a:stretch>
+            <a:fillRect/>
+          </a:stretch>
+        </p:blipFill>
+        <p:spPr>
+          <a:xfrm>
             <a:off x="1100938" y="5426050"/>
             <a:ext cx="404165" cy="404165"/>
           </a:xfrm>
@@ -8357,7 +8430,7 @@
           <a:bodyPr wrap="square" rtlCol="0" anchor="ctr"/>
           <a:lstStyle/>
           <a:p>
-            <a:pPr indent="0" marL="0">
+            <a:pPr marL="0" indent="0">
               <a:buNone/>
             </a:pPr>
             <a:r>
@@ -8369,11 +8442,8 @@
                 <a:ea typeface="Calibri" pitchFamily="34" charset="-122"/>
                 <a:cs typeface="Calibri" pitchFamily="34" charset="-120"/>
               </a:rPr>
-              <a:t>Minibus taxi analogy:  </a:t>
-            </a:r>
-            <a:pPr indent="0" marL="0">
-              <a:buNone/>
-            </a:pPr>
+              <a:t>Taxi analogy:  </a:t>
+            </a:r>
             <a:r>
               <a:rPr lang="en-US" sz="1500" dirty="0">
                 <a:solidFill>
@@ -8410,7 +8480,7 @@
           <a:bodyPr wrap="square" rtlCol="0" anchor="ctr"/>
           <a:lstStyle/>
           <a:p>
-            <a:pPr algn="r" indent="0" marL="0">
+            <a:pPr marL="0" indent="0" algn="r">
               <a:buNone/>
             </a:pPr>
             <a:r>
@@ -8444,6 +8514,7 @@
         <a:solidFill>
           <a:srgbClr val="FFFFFF"/>
         </a:solidFill>
+        <a:effectLst/>
       </p:bgPr>
     </p:bg>
     <p:spTree>
@@ -8481,11 +8552,11 @@
           <a:bodyPr wrap="square" rtlCol="0" anchor="ctr"/>
           <a:lstStyle/>
           <a:p>
-            <a:pPr indent="0" marL="0">
-              <a:buNone/>
-            </a:pPr>
-            <a:r>
-              <a:rPr lang="en-US" sz="1300" b="1" spc="200" kern="0" dirty="0">
+            <a:pPr marL="0" indent="0">
+              <a:buNone/>
+            </a:pPr>
+            <a:r>
+              <a:rPr lang="en-US" sz="1300" b="1" kern="0" spc="200" dirty="0">
                 <a:solidFill>
                   <a:srgbClr val="00A896"/>
                 </a:solidFill>
@@ -8518,17 +8589,24 @@
           </a:solidFill>
           <a:ln/>
         </p:spPr>
+        <p:txBody>
+          <a:bodyPr/>
+          <a:lstStyle/>
+          <a:p>
+            <a:endParaRPr lang="en-US"/>
+          </a:p>
+        </p:txBody>
       </p:sp>
       <p:pic>
         <p:nvPicPr>
-          <p:cNvPr id="4" name="Image 0" descr="preencoded.png">    </p:cNvPr>
+          <p:cNvPr id="4" name="Image 0" descr="preencoded.png"/>
           <p:cNvPicPr>
             <a:picLocks noChangeAspect="1"/>
           </p:cNvPicPr>
           <p:nvPr/>
         </p:nvPicPr>
         <p:blipFill>
-          <a:blip r:embed="rId1"/>
+          <a:blip r:embed="rId3"/>
           <a:stretch>
             <a:fillRect/>
           </a:stretch>
@@ -8564,7 +8642,7 @@
           <a:bodyPr wrap="square" rtlCol="0" anchor="ctr"/>
           <a:lstStyle/>
           <a:p>
-            <a:pPr indent="0" marL="0">
+            <a:pPr marL="0" indent="0">
               <a:buNone/>
             </a:pPr>
             <a:r>
@@ -8584,128 +8662,6 @@
       </p:sp>
       <p:sp>
         <p:nvSpPr>
-          <p:cNvPr id="6" name="Shape 3"/>
-          <p:cNvSpPr/>
-          <p:nvPr/>
-        </p:nvSpPr>
-        <p:spPr>
-          <a:xfrm>
-            <a:off x="8503920" y="640080"/>
-            <a:ext cx="2560320" cy="685800"/>
-          </a:xfrm>
-          <a:prstGeom prst="roundRect">
-            <a:avLst>
-              <a:gd name="adj" fmla="val 20000"/>
-            </a:avLst>
-          </a:prstGeom>
-          <a:solidFill>
-            <a:srgbClr val="F2F7F7"/>
-          </a:solidFill>
-          <a:ln/>
-        </p:spPr>
-      </p:sp>
-      <p:sp>
-        <p:nvSpPr>
-          <p:cNvPr id="7" name="Shape 4"/>
-          <p:cNvSpPr/>
-          <p:nvPr/>
-        </p:nvSpPr>
-        <p:spPr>
-          <a:xfrm>
-            <a:off x="8641080" y="758952"/>
-            <a:ext cx="457200" cy="457200"/>
-          </a:xfrm>
-          <a:prstGeom prst="ellipse">
-            <a:avLst/>
-          </a:prstGeom>
-          <a:solidFill>
-            <a:srgbClr val="00A896"/>
-          </a:solidFill>
-          <a:ln/>
-        </p:spPr>
-      </p:sp>
-      <p:pic>
-        <p:nvPicPr>
-          <p:cNvPr id="8" name="Image 1" descr="preencoded.png">    </p:cNvPr>
-          <p:cNvPicPr>
-            <a:picLocks noChangeAspect="1"/>
-          </p:cNvPicPr>
-          <p:nvPr/>
-        </p:nvPicPr>
-        <p:blipFill>
-          <a:blip r:embed="rId2"/>
-          <a:stretch>
-            <a:fillRect/>
-          </a:stretch>
-        </p:blipFill>
-        <p:spPr>
-          <a:xfrm>
-            <a:off x="8732520" y="850392"/>
-            <a:ext cx="274320" cy="274320"/>
-          </a:xfrm>
-          <a:prstGeom prst="rect">
-            <a:avLst/>
-          </a:prstGeom>
-        </p:spPr>
-      </p:pic>
-      <p:sp>
-        <p:nvSpPr>
-          <p:cNvPr id="9" name="Text 5"/>
-          <p:cNvSpPr/>
-          <p:nvPr/>
-        </p:nvSpPr>
-        <p:spPr>
-          <a:xfrm>
-            <a:off x="9189720" y="640080"/>
-            <a:ext cx="1828800" cy="685800"/>
-          </a:xfrm>
-          <a:prstGeom prst="rect">
-            <a:avLst/>
-          </a:prstGeom>
-          <a:noFill/>
-          <a:ln/>
-        </p:spPr>
-        <p:txBody>
-          <a:bodyPr wrap="square" rtlCol="0" anchor="ctr"/>
-          <a:lstStyle/>
-          <a:p>
-            <a:pPr indent="0" marL="0">
-              <a:buNone/>
-            </a:pPr>
-            <a:r>
-              <a:rPr lang="en-US" sz="1200" b="1" dirty="0">
-                <a:solidFill>
-                  <a:srgbClr val="1B2B2B"/>
-                </a:solidFill>
-                <a:latin typeface="Calibri" pitchFamily="34" charset="0"/>
-                <a:ea typeface="Calibri" pitchFamily="34" charset="-122"/>
-                <a:cs typeface="Calibri" pitchFamily="34" charset="-120"/>
-              </a:rPr>
-              <a:t>12 min</a:t>
-            </a:r>
-            <a:endParaRPr lang="en-US" sz="1200" dirty="0"/>
-          </a:p>
-          <a:p>
-            <a:pPr indent="0" marL="0">
-              <a:buNone/>
-            </a:pPr>
-            <a:r>
-              <a:rPr lang="en-US" sz="1200" b="1" dirty="0">
-                <a:solidFill>
-                  <a:srgbClr val="1B2B2B"/>
-                </a:solidFill>
-                <a:latin typeface="Calibri" pitchFamily="34" charset="0"/>
-                <a:ea typeface="Calibri" pitchFamily="34" charset="-122"/>
-                <a:cs typeface="Calibri" pitchFamily="34" charset="-120"/>
-              </a:rPr>
-              <a:t>in pairs</a:t>
-            </a:r>
-            <a:endParaRPr lang="en-US" sz="1200" dirty="0"/>
-          </a:p>
-        </p:txBody>
-      </p:sp>
-      <p:sp>
-        <p:nvSpPr>
           <p:cNvPr id="10" name="Text 6"/>
           <p:cNvSpPr/>
           <p:nvPr/>
@@ -8725,7 +8681,7 @@
           <a:bodyPr wrap="square" rtlCol="0" anchor="ctr"/>
           <a:lstStyle/>
           <a:p>
-            <a:pPr indent="0" marL="0">
+            <a:pPr marL="0" indent="0">
               <a:buNone/>
             </a:pPr>
             <a:r>
@@ -8764,6 +8720,13 @@
           </a:solidFill>
           <a:ln/>
         </p:spPr>
+        <p:txBody>
+          <a:bodyPr/>
+          <a:lstStyle/>
+          <a:p>
+            <a:endParaRPr lang="en-US"/>
+          </a:p>
+        </p:txBody>
       </p:sp>
       <p:sp>
         <p:nvSpPr>
@@ -8786,7 +8749,7 @@
           <a:bodyPr wrap="square" rtlCol="0" anchor="ctr"/>
           <a:lstStyle/>
           <a:p>
-            <a:pPr indent="0" marL="0">
+            <a:pPr marL="0" indent="0">
               <a:buNone/>
             </a:pPr>
             <a:r>
@@ -8825,6 +8788,13 @@
           </a:solidFill>
           <a:ln/>
         </p:spPr>
+        <p:txBody>
+          <a:bodyPr/>
+          <a:lstStyle/>
+          <a:p>
+            <a:endParaRPr lang="en-US"/>
+          </a:p>
+        </p:txBody>
       </p:sp>
       <p:sp>
         <p:nvSpPr>
@@ -8847,7 +8817,7 @@
           <a:bodyPr wrap="square" rtlCol="0" anchor="ctr"/>
           <a:lstStyle/>
           <a:p>
-            <a:pPr indent="0" marL="0">
+            <a:pPr marL="0" indent="0">
               <a:buNone/>
             </a:pPr>
             <a:r>
@@ -8886,6 +8856,13 @@
           </a:solidFill>
           <a:ln/>
         </p:spPr>
+        <p:txBody>
+          <a:bodyPr/>
+          <a:lstStyle/>
+          <a:p>
+            <a:endParaRPr lang="en-US"/>
+          </a:p>
+        </p:txBody>
       </p:sp>
       <p:sp>
         <p:nvSpPr>
@@ -8908,7 +8885,7 @@
           <a:bodyPr wrap="square" rtlCol="0" anchor="ctr"/>
           <a:lstStyle/>
           <a:p>
-            <a:pPr indent="0" marL="0">
+            <a:pPr marL="0" indent="0">
               <a:buNone/>
             </a:pPr>
             <a:r>
@@ -8947,6 +8924,13 @@
           </a:solidFill>
           <a:ln/>
         </p:spPr>
+        <p:txBody>
+          <a:bodyPr/>
+          <a:lstStyle/>
+          <a:p>
+            <a:endParaRPr lang="en-US"/>
+          </a:p>
+        </p:txBody>
       </p:sp>
       <p:sp>
         <p:nvSpPr>
@@ -8969,7 +8953,7 @@
           <a:bodyPr wrap="square" rtlCol="0" anchor="ctr"/>
           <a:lstStyle/>
           <a:p>
-            <a:pPr indent="0" marL="0">
+            <a:pPr marL="0" indent="0">
               <a:buNone/>
             </a:pPr>
             <a:r>
@@ -9008,7 +8992,7 @@
           <a:bodyPr wrap="square" rtlCol="0" anchor="ctr"/>
           <a:lstStyle/>
           <a:p>
-            <a:pPr algn="r" indent="0" marL="0">
+            <a:pPr marL="0" indent="0" algn="r">
               <a:buNone/>
             </a:pPr>
             <a:r>
@@ -9327,4 +9311,319 @@
     </a:ext>
   </a:extLst>
 </a:theme>
+</file>
+
+<file path=ppt/theme/theme2.xml><?xml version="1.0" encoding="utf-8"?>
+<a:theme xmlns:a="http://schemas.openxmlformats.org/drawingml/2006/main" name="Office Theme">
+  <a:themeElements>
+    <a:clrScheme name="Office">
+      <a:dk1>
+        <a:sysClr val="windowText" lastClr="000000"/>
+      </a:dk1>
+      <a:lt1>
+        <a:sysClr val="window" lastClr="FFFFFF"/>
+      </a:lt1>
+      <a:dk2>
+        <a:srgbClr val="0E2841"/>
+      </a:dk2>
+      <a:lt2>
+        <a:srgbClr val="E8E8E8"/>
+      </a:lt2>
+      <a:accent1>
+        <a:srgbClr val="156082"/>
+      </a:accent1>
+      <a:accent2>
+        <a:srgbClr val="E97132"/>
+      </a:accent2>
+      <a:accent3>
+        <a:srgbClr val="196B24"/>
+      </a:accent3>
+      <a:accent4>
+        <a:srgbClr val="0F9ED5"/>
+      </a:accent4>
+      <a:accent5>
+        <a:srgbClr val="A02B93"/>
+      </a:accent5>
+      <a:accent6>
+        <a:srgbClr val="4EA72E"/>
+      </a:accent6>
+      <a:hlink>
+        <a:srgbClr val="467886"/>
+      </a:hlink>
+      <a:folHlink>
+        <a:srgbClr val="96607D"/>
+      </a:folHlink>
+    </a:clrScheme>
+    <a:fontScheme name="Office">
+      <a:majorFont>
+        <a:latin typeface="Aptos Display" panose="02110004020202020204"/>
+        <a:ea typeface=""/>
+        <a:cs typeface=""/>
+        <a:font script="Jpan" typeface="游ゴシック Light"/>
+        <a:font script="Hang" typeface="맑은 고딕"/>
+        <a:font script="Hans" typeface="等线 Light"/>
+        <a:font script="Hant" typeface="新細明體"/>
+        <a:font script="Arab" typeface="Times New Roman"/>
+        <a:font script="Hebr" typeface="Times New Roman"/>
+        <a:font script="Thai" typeface="Angsana New"/>
+        <a:font script="Ethi" typeface="Nyala"/>
+        <a:font script="Beng" typeface="Vrinda"/>
+        <a:font script="Gujr" typeface="Shruti"/>
+        <a:font script="Khmr" typeface="MoolBoran"/>
+        <a:font script="Knda" typeface="Tunga"/>
+        <a:font script="Guru" typeface="Raavi"/>
+        <a:font script="Cans" typeface="Euphemia"/>
+        <a:font script="Cher" typeface="Plantagenet Cherokee"/>
+        <a:font script="Yiii" typeface="Microsoft Yi Baiti"/>
+        <a:font script="Tibt" typeface="Microsoft Himalaya"/>
+        <a:font script="Thaa" typeface="MV Boli"/>
+        <a:font script="Deva" typeface="Mangal"/>
+        <a:font script="Telu" typeface="Gautami"/>
+        <a:font script="Taml" typeface="Latha"/>
+        <a:font script="Syrc" typeface="Estrangelo Edessa"/>
+        <a:font script="Orya" typeface="Kalinga"/>
+        <a:font script="Mlym" typeface="Kartika"/>
+        <a:font script="Laoo" typeface="DokChampa"/>
+        <a:font script="Sinh" typeface="Iskoola Pota"/>
+        <a:font script="Mong" typeface="Mongolian Baiti"/>
+        <a:font script="Viet" typeface="Times New Roman"/>
+        <a:font script="Uigh" typeface="Microsoft Uighur"/>
+        <a:font script="Geor" typeface="Sylfaen"/>
+        <a:font script="Armn" typeface="Arial"/>
+        <a:font script="Bugi" typeface="Leelawadee UI"/>
+        <a:font script="Bopo" typeface="Microsoft JhengHei"/>
+        <a:font script="Java" typeface="Javanese Text"/>
+        <a:font script="Lisu" typeface="Segoe UI"/>
+        <a:font script="Mymr" typeface="Myanmar Text"/>
+        <a:font script="Nkoo" typeface="Ebrima"/>
+        <a:font script="Olck" typeface="Nirmala UI"/>
+        <a:font script="Osma" typeface="Ebrima"/>
+        <a:font script="Phag" typeface="Phagspa"/>
+        <a:font script="Syrn" typeface="Estrangelo Edessa"/>
+        <a:font script="Syrj" typeface="Estrangelo Edessa"/>
+        <a:font script="Syre" typeface="Estrangelo Edessa"/>
+        <a:font script="Sora" typeface="Nirmala UI"/>
+        <a:font script="Tale" typeface="Microsoft Tai Le"/>
+        <a:font script="Talu" typeface="Microsoft New Tai Lue"/>
+        <a:font script="Tfng" typeface="Ebrima"/>
+      </a:majorFont>
+      <a:minorFont>
+        <a:latin typeface="Aptos" panose="02110004020202020204"/>
+        <a:ea typeface=""/>
+        <a:cs typeface=""/>
+        <a:font script="Jpan" typeface="游ゴシック"/>
+        <a:font script="Hang" typeface="맑은 고딕"/>
+        <a:font script="Hans" typeface="等线"/>
+        <a:font script="Hant" typeface="新細明體"/>
+        <a:font script="Arab" typeface="Arial"/>
+        <a:font script="Hebr" typeface="Arial"/>
+        <a:font script="Thai" typeface="Cordia New"/>
+        <a:font script="Ethi" typeface="Nyala"/>
+        <a:font script="Beng" typeface="Vrinda"/>
+        <a:font script="Gujr" typeface="Shruti"/>
+        <a:font script="Khmr" typeface="DaunPenh"/>
+        <a:font script="Knda" typeface="Tunga"/>
+        <a:font script="Guru" typeface="Raavi"/>
+        <a:font script="Cans" typeface="Euphemia"/>
+        <a:font script="Cher" typeface="Plantagenet Cherokee"/>
+        <a:font script="Yiii" typeface="Microsoft Yi Baiti"/>
+        <a:font script="Tibt" typeface="Microsoft Himalaya"/>
+        <a:font script="Thaa" typeface="MV Boli"/>
+        <a:font script="Deva" typeface="Mangal"/>
+        <a:font script="Telu" typeface="Gautami"/>
+        <a:font script="Taml" typeface="Latha"/>
+        <a:font script="Syrc" typeface="Estrangelo Edessa"/>
+        <a:font script="Orya" typeface="Kalinga"/>
+        <a:font script="Mlym" typeface="Kartika"/>
+        <a:font script="Laoo" typeface="DokChampa"/>
+        <a:font script="Sinh" typeface="Iskoola Pota"/>
+        <a:font script="Mong" typeface="Mongolian Baiti"/>
+        <a:font script="Viet" typeface="Arial"/>
+        <a:font script="Uigh" typeface="Microsoft Uighur"/>
+        <a:font script="Geor" typeface="Sylfaen"/>
+        <a:font script="Armn" typeface="Arial"/>
+        <a:font script="Bugi" typeface="Leelawadee UI"/>
+        <a:font script="Bopo" typeface="Microsoft JhengHei"/>
+        <a:font script="Java" typeface="Javanese Text"/>
+        <a:font script="Lisu" typeface="Segoe UI"/>
+        <a:font script="Mymr" typeface="Myanmar Text"/>
+        <a:font script="Nkoo" typeface="Ebrima"/>
+        <a:font script="Olck" typeface="Nirmala UI"/>
+        <a:font script="Osma" typeface="Ebrima"/>
+        <a:font script="Phag" typeface="Phagspa"/>
+        <a:font script="Syrn" typeface="Estrangelo Edessa"/>
+        <a:font script="Syrj" typeface="Estrangelo Edessa"/>
+        <a:font script="Syre" typeface="Estrangelo Edessa"/>
+        <a:font script="Sora" typeface="Nirmala UI"/>
+        <a:font script="Tale" typeface="Microsoft Tai Le"/>
+        <a:font script="Talu" typeface="Microsoft New Tai Lue"/>
+        <a:font script="Tfng" typeface="Ebrima"/>
+      </a:minorFont>
+    </a:fontScheme>
+    <a:fmtScheme name="Office">
+      <a:fillStyleLst>
+        <a:solidFill>
+          <a:schemeClr val="phClr"/>
+        </a:solidFill>
+        <a:gradFill rotWithShape="1">
+          <a:gsLst>
+            <a:gs pos="0">
+              <a:schemeClr val="phClr">
+                <a:lumMod val="110000"/>
+                <a:satMod val="105000"/>
+                <a:tint val="67000"/>
+              </a:schemeClr>
+            </a:gs>
+            <a:gs pos="50000">
+              <a:schemeClr val="phClr">
+                <a:lumMod val="105000"/>
+                <a:satMod val="103000"/>
+                <a:tint val="73000"/>
+              </a:schemeClr>
+            </a:gs>
+            <a:gs pos="100000">
+              <a:schemeClr val="phClr">
+                <a:lumMod val="105000"/>
+                <a:satMod val="109000"/>
+                <a:tint val="81000"/>
+              </a:schemeClr>
+            </a:gs>
+          </a:gsLst>
+          <a:lin ang="5400000" scaled="0"/>
+        </a:gradFill>
+        <a:gradFill rotWithShape="1">
+          <a:gsLst>
+            <a:gs pos="0">
+              <a:schemeClr val="phClr">
+                <a:satMod val="103000"/>
+                <a:lumMod val="102000"/>
+                <a:tint val="94000"/>
+              </a:schemeClr>
+            </a:gs>
+            <a:gs pos="50000">
+              <a:schemeClr val="phClr">
+                <a:satMod val="110000"/>
+                <a:lumMod val="100000"/>
+                <a:shade val="100000"/>
+              </a:schemeClr>
+            </a:gs>
+            <a:gs pos="100000">
+              <a:schemeClr val="phClr">
+                <a:lumMod val="99000"/>
+                <a:satMod val="120000"/>
+                <a:shade val="78000"/>
+              </a:schemeClr>
+            </a:gs>
+          </a:gsLst>
+          <a:lin ang="5400000" scaled="0"/>
+        </a:gradFill>
+      </a:fillStyleLst>
+      <a:lnStyleLst>
+        <a:ln w="12700" cap="flat" cmpd="sng" algn="ctr">
+          <a:solidFill>
+            <a:schemeClr val="phClr"/>
+          </a:solidFill>
+          <a:prstDash val="solid"/>
+          <a:miter lim="800000"/>
+        </a:ln>
+        <a:ln w="19050" cap="flat" cmpd="sng" algn="ctr">
+          <a:solidFill>
+            <a:schemeClr val="phClr"/>
+          </a:solidFill>
+          <a:prstDash val="solid"/>
+          <a:miter lim="800000"/>
+        </a:ln>
+        <a:ln w="25400" cap="flat" cmpd="sng" algn="ctr">
+          <a:solidFill>
+            <a:schemeClr val="phClr"/>
+          </a:solidFill>
+          <a:prstDash val="solid"/>
+          <a:miter lim="800000"/>
+        </a:ln>
+      </a:lnStyleLst>
+      <a:effectStyleLst>
+        <a:effectStyle>
+          <a:effectLst/>
+        </a:effectStyle>
+        <a:effectStyle>
+          <a:effectLst/>
+        </a:effectStyle>
+        <a:effectStyle>
+          <a:effectLst>
+            <a:outerShdw blurRad="57150" dist="19050" dir="5400000" algn="ctr" rotWithShape="0">
+              <a:srgbClr val="000000">
+                <a:alpha val="63000"/>
+              </a:srgbClr>
+            </a:outerShdw>
+          </a:effectLst>
+        </a:effectStyle>
+      </a:effectStyleLst>
+      <a:bgFillStyleLst>
+        <a:solidFill>
+          <a:schemeClr val="phClr"/>
+        </a:solidFill>
+        <a:solidFill>
+          <a:schemeClr val="phClr">
+            <a:tint val="95000"/>
+            <a:satMod val="170000"/>
+          </a:schemeClr>
+        </a:solidFill>
+        <a:gradFill rotWithShape="1">
+          <a:gsLst>
+            <a:gs pos="0">
+              <a:schemeClr val="phClr">
+                <a:tint val="93000"/>
+                <a:satMod val="150000"/>
+                <a:shade val="98000"/>
+                <a:lumMod val="102000"/>
+              </a:schemeClr>
+            </a:gs>
+            <a:gs pos="50000">
+              <a:schemeClr val="phClr">
+                <a:tint val="98000"/>
+                <a:satMod val="130000"/>
+                <a:shade val="90000"/>
+                <a:lumMod val="103000"/>
+              </a:schemeClr>
+            </a:gs>
+            <a:gs pos="100000">
+              <a:schemeClr val="phClr">
+                <a:shade val="63000"/>
+                <a:satMod val="120000"/>
+              </a:schemeClr>
+            </a:gs>
+          </a:gsLst>
+          <a:lin ang="5400000" scaled="0"/>
+        </a:gradFill>
+      </a:bgFillStyleLst>
+    </a:fmtScheme>
+  </a:themeElements>
+  <a:objectDefaults>
+    <a:lnDef>
+      <a:spPr/>
+      <a:bodyPr/>
+      <a:lstStyle/>
+      <a:style>
+        <a:lnRef idx="2">
+          <a:schemeClr val="accent1"/>
+        </a:lnRef>
+        <a:fillRef idx="0">
+          <a:schemeClr val="accent1"/>
+        </a:fillRef>
+        <a:effectRef idx="1">
+          <a:schemeClr val="accent1"/>
+        </a:effectRef>
+        <a:fontRef idx="minor">
+          <a:schemeClr val="tx1"/>
+        </a:fontRef>
+      </a:style>
+    </a:lnDef>
+  </a:objectDefaults>
+  <a:extraClrSchemeLst/>
+  <a:extLst>
+    <a:ext uri="{05A4C25C-085E-4340-85A3-A5531E510DB2}">
+      <thm15:themeFamily xmlns:thm15="http://schemas.microsoft.com/office/thememl/2012/main" name="Office Theme" id="{2E142A2C-CD16-42D6-873A-C26D2A0506FA}" vid="{1BDDFF52-6CD6-40A5-AB3C-68EB2F1E4D0A}"/>
+    </a:ext>
+  </a:extLst>
+</a:theme>
 </file>